--- a/Nexora-Payroll-Presentation.pptx
+++ b/Nexora-Payroll-Presentation.pptx
@@ -1610,7 +1610,7 @@
           <a:p>
             <a:r>
               <a:rPr lang="en-US" dirty="0"/>
-              <a:t>The split manager is the hardest thing in this payroll and the thing Tony flagged himself — it lands exactly. The three cost centres that differ cancel to a cent between them, so this is a staff-assignment question, not a calculation one. Ask which centre those people belong to.</a:t>
+              <a:t>The split manager is the hardest thing in this payroll and the thing Tony flagged himself — it lands exactly. Handle the formula correction generously: the point is that comparing two independent calculations is what surfaced it, which is the case for running them side by side, not a criticism of anyone. The workbook's own total never changed — the money was always right, just filed to the wrong centre.</a:t>
             </a:r>
             <a:endParaRPr lang="en-US" dirty="0"/>
           </a:p>
@@ -15974,7 +15974,7 @@
                 <a:gridCol w="1508760"/>
                 <a:gridCol w="1234440"/>
               </a:tblGrid>
-              <a:tr h="283464">
+              <a:tr h="256032">
                 <a:tc>
                   <a:txBody>
                     <a:bodyPr/>
@@ -15984,7 +15984,7 @@
                         <a:buNone/>
                       </a:pPr>
                       <a:r>
-                        <a:rPr lang="en-US" sz="1100" b="1" dirty="0">
+                        <a:rPr lang="en-US" sz="1050" b="1" dirty="0">
                           <a:solidFill>
                             <a:srgbClr val="16232E"/>
                           </a:solidFill>
@@ -15994,7 +15994,7 @@
                         </a:rPr>
                         <a:t>Cost centre</a:t>
                       </a:r>
-                      <a:endParaRPr lang="en-US" sz="1100" dirty="0">
+                      <a:endParaRPr lang="en-US" sz="1050" dirty="0">
                         <a:latin typeface="Calibri" charset="0"/>
                         <a:ea typeface="Calibri" charset="0"/>
                         <a:cs typeface="Calibri" charset="0"/>
@@ -16052,7 +16052,7 @@
                         <a:buNone/>
                       </a:pPr>
                       <a:r>
-                        <a:rPr lang="en-US" sz="1100" b="1" dirty="0">
+                        <a:rPr lang="en-US" sz="1050" b="1" dirty="0">
                           <a:solidFill>
                             <a:srgbClr val="16232E"/>
                           </a:solidFill>
@@ -16062,7 +16062,7 @@
                         </a:rPr>
                         <a:t>Your sheet</a:t>
                       </a:r>
-                      <a:endParaRPr lang="en-US" sz="1100" dirty="0">
+                      <a:endParaRPr lang="en-US" sz="1050" dirty="0">
                         <a:latin typeface="Calibri" charset="0"/>
                         <a:ea typeface="Calibri" charset="0"/>
                         <a:cs typeface="Calibri" charset="0"/>
@@ -16120,7 +16120,7 @@
                         <a:buNone/>
                       </a:pPr>
                       <a:r>
-                        <a:rPr lang="en-US" sz="1100" b="1" dirty="0">
+                        <a:rPr lang="en-US" sz="1050" b="1" dirty="0">
                           <a:solidFill>
                             <a:srgbClr val="16232E"/>
                           </a:solidFill>
@@ -16130,7 +16130,7 @@
                         </a:rPr>
                         <a:t>Nexora</a:t>
                       </a:r>
-                      <a:endParaRPr lang="en-US" sz="1100" dirty="0">
+                      <a:endParaRPr lang="en-US" sz="1050" dirty="0">
                         <a:latin typeface="Calibri" charset="0"/>
                         <a:ea typeface="Calibri" charset="0"/>
                         <a:cs typeface="Calibri" charset="0"/>
@@ -16188,7 +16188,7 @@
                         <a:buNone/>
                       </a:pPr>
                       <a:r>
-                        <a:rPr lang="en-US" sz="1100" b="1" dirty="0">
+                        <a:rPr lang="en-US" sz="1050" b="1" dirty="0">
                           <a:solidFill>
                             <a:srgbClr val="16232E"/>
                           </a:solidFill>
@@ -16198,7 +16198,7 @@
                         </a:rPr>
                         <a:t>Difference</a:t>
                       </a:r>
-                      <a:endParaRPr lang="en-US" sz="1100" dirty="0">
+                      <a:endParaRPr lang="en-US" sz="1050" dirty="0">
                         <a:latin typeface="Calibri" charset="0"/>
                         <a:ea typeface="Calibri" charset="0"/>
                         <a:cs typeface="Calibri" charset="0"/>
@@ -16248,7 +16248,7 @@
                   </a:tcPr>
                 </a:tc>
               </a:tr>
-              <a:tr h="283464">
+              <a:tr h="256032">
                 <a:tc>
                   <a:txBody>
                     <a:bodyPr/>
@@ -16258,7 +16258,7 @@
                         <a:buNone/>
                       </a:pPr>
                       <a:r>
-                        <a:rPr lang="en-US" sz="1100" dirty="0">
+                        <a:rPr lang="en-US" sz="1050" dirty="0">
                           <a:solidFill>
                             <a:srgbClr val="16232E"/>
                           </a:solidFill>
@@ -16268,7 +16268,7 @@
                         </a:rPr>
                         <a:t>Finance (121)</a:t>
                       </a:r>
-                      <a:endParaRPr lang="en-US" sz="1100" dirty="0">
+                      <a:endParaRPr lang="en-US" sz="1050" dirty="0">
                         <a:latin typeface="Calibri" charset="0"/>
                         <a:ea typeface="Calibri" charset="0"/>
                         <a:cs typeface="Calibri" charset="0"/>
@@ -16326,7 +16326,7 @@
                         <a:buNone/>
                       </a:pPr>
                       <a:r>
-                        <a:rPr lang="en-US" sz="1100" dirty="0">
+                        <a:rPr lang="en-US" sz="1050" dirty="0">
                           <a:solidFill>
                             <a:srgbClr val="16232E"/>
                           </a:solidFill>
@@ -16334,9 +16334,9 @@
                           <a:ea typeface="Calibri" pitchFamily="34" charset="-122"/>
                           <a:cs typeface="Calibri" pitchFamily="34" charset="-120"/>
                         </a:rPr>
-                        <a:t>1,646,566.48</a:t>
+                        <a:t>1,397,855.30</a:t>
                       </a:r>
-                      <a:endParaRPr lang="en-US" sz="1100" dirty="0">
+                      <a:endParaRPr lang="en-US" sz="1050" dirty="0">
                         <a:latin typeface="Calibri" charset="0"/>
                         <a:ea typeface="Calibri" charset="0"/>
                         <a:cs typeface="Calibri" charset="0"/>
@@ -16394,7 +16394,7 @@
                         <a:buNone/>
                       </a:pPr>
                       <a:r>
-                        <a:rPr lang="en-US" sz="1100" dirty="0">
+                        <a:rPr lang="en-US" sz="1050" dirty="0">
                           <a:solidFill>
                             <a:srgbClr val="16232E"/>
                           </a:solidFill>
@@ -16402,9 +16402,9 @@
                           <a:ea typeface="Calibri" pitchFamily="34" charset="-122"/>
                           <a:cs typeface="Calibri" pitchFamily="34" charset="-120"/>
                         </a:rPr>
-                        <a:t>1,646,566.49</a:t>
+                        <a:t>1,397,855.31</a:t>
                       </a:r>
-                      <a:endParaRPr lang="en-US" sz="1100" dirty="0">
+                      <a:endParaRPr lang="en-US" sz="1050" dirty="0">
                         <a:latin typeface="Calibri" charset="0"/>
                         <a:ea typeface="Calibri" charset="0"/>
                         <a:cs typeface="Calibri" charset="0"/>
@@ -16462,7 +16462,7 @@
                         <a:buNone/>
                       </a:pPr>
                       <a:r>
-                        <a:rPr lang="en-US" sz="1100" b="1" dirty="0">
+                        <a:rPr lang="en-US" sz="1050" b="1" dirty="0">
                           <a:solidFill>
                             <a:srgbClr val="1B7A4F"/>
                           </a:solidFill>
@@ -16472,7 +16472,7 @@
                         </a:rPr>
                         <a:t>(0.01)</a:t>
                       </a:r>
-                      <a:endParaRPr lang="en-US" sz="1100" dirty="0">
+                      <a:endParaRPr lang="en-US" sz="1050" dirty="0">
                         <a:latin typeface="Calibri" charset="0"/>
                         <a:ea typeface="Calibri" charset="0"/>
                         <a:cs typeface="Calibri" charset="0"/>
@@ -16522,7 +16522,7 @@
                   </a:tcPr>
                 </a:tc>
               </a:tr>
-              <a:tr h="283464">
+              <a:tr h="256032">
                 <a:tc>
                   <a:txBody>
                     <a:bodyPr/>
@@ -16532,7 +16532,7 @@
                         <a:buNone/>
                       </a:pPr>
                       <a:r>
-                        <a:rPr lang="en-US" sz="1100" dirty="0">
+                        <a:rPr lang="en-US" sz="1050" dirty="0">
                           <a:solidFill>
                             <a:srgbClr val="16232E"/>
                           </a:solidFill>
@@ -16540,9 +16540,9 @@
                           <a:ea typeface="Calibri" pitchFamily="34" charset="-122"/>
                           <a:cs typeface="Calibri" pitchFamily="34" charset="-120"/>
                         </a:rPr>
-                        <a:t>Technical (204)</a:t>
+                        <a:t>General Manager (121 / 512)</a:t>
                       </a:r>
-                      <a:endParaRPr lang="en-US" sz="1100" dirty="0">
+                      <a:endParaRPr lang="en-US" sz="1050" dirty="0">
                         <a:latin typeface="Calibri" charset="0"/>
                         <a:ea typeface="Calibri" charset="0"/>
                         <a:cs typeface="Calibri" charset="0"/>
@@ -16600,7 +16600,7 @@
                         <a:buNone/>
                       </a:pPr>
                       <a:r>
-                        <a:rPr lang="en-US" sz="1100" dirty="0">
+                        <a:rPr lang="en-US" sz="1050" dirty="0">
                           <a:solidFill>
                             <a:srgbClr val="16232E"/>
                           </a:solidFill>
@@ -16608,9 +16608,9 @@
                           <a:ea typeface="Calibri" pitchFamily="34" charset="-122"/>
                           <a:cs typeface="Calibri" pitchFamily="34" charset="-120"/>
                         </a:rPr>
-                        <a:t>2,225,722.79</a:t>
+                        <a:t>497,422.35</a:t>
                       </a:r>
-                      <a:endParaRPr lang="en-US" sz="1100" dirty="0">
+                      <a:endParaRPr lang="en-US" sz="1050" dirty="0">
                         <a:latin typeface="Calibri" charset="0"/>
                         <a:ea typeface="Calibri" charset="0"/>
                         <a:cs typeface="Calibri" charset="0"/>
@@ -16668,7 +16668,7 @@
                         <a:buNone/>
                       </a:pPr>
                       <a:r>
-                        <a:rPr lang="en-US" sz="1100" dirty="0">
+                        <a:rPr lang="en-US" sz="1050" dirty="0">
                           <a:solidFill>
                             <a:srgbClr val="16232E"/>
                           </a:solidFill>
@@ -16676,9 +16676,9 @@
                           <a:ea typeface="Calibri" pitchFamily="34" charset="-122"/>
                           <a:cs typeface="Calibri" pitchFamily="34" charset="-120"/>
                         </a:rPr>
-                        <a:t>2,224,672.81</a:t>
+                        <a:t>497,422.36</a:t>
                       </a:r>
-                      <a:endParaRPr lang="en-US" sz="1100" dirty="0">
+                      <a:endParaRPr lang="en-US" sz="1050" dirty="0">
                         <a:latin typeface="Calibri" charset="0"/>
                         <a:ea typeface="Calibri" charset="0"/>
                         <a:cs typeface="Calibri" charset="0"/>
@@ -16736,17 +16736,17 @@
                         <a:buNone/>
                       </a:pPr>
                       <a:r>
-                        <a:rPr lang="en-US" sz="1100" b="1" dirty="0">
+                        <a:rPr lang="en-US" sz="1050" b="1" dirty="0">
                           <a:solidFill>
-                            <a:srgbClr val="9A6206"/>
+                            <a:srgbClr val="1B7A4F"/>
                           </a:solidFill>
                           <a:latin typeface="Calibri" pitchFamily="34" charset="0"/>
                           <a:ea typeface="Calibri" pitchFamily="34" charset="-122"/>
                           <a:cs typeface="Calibri" pitchFamily="34" charset="-120"/>
                         </a:rPr>
-                        <a:t>1,049.98</a:t>
+                        <a:t>(0.01)</a:t>
                       </a:r>
-                      <a:endParaRPr lang="en-US" sz="1100" dirty="0">
+                      <a:endParaRPr lang="en-US" sz="1050" dirty="0">
                         <a:latin typeface="Calibri" charset="0"/>
                         <a:ea typeface="Calibri" charset="0"/>
                         <a:cs typeface="Calibri" charset="0"/>
@@ -16796,7 +16796,7 @@
                   </a:tcPr>
                 </a:tc>
               </a:tr>
-              <a:tr h="283464">
+              <a:tr h="256032">
                 <a:tc>
                   <a:txBody>
                     <a:bodyPr/>
@@ -16806,7 +16806,7 @@
                         <a:buNone/>
                       </a:pPr>
                       <a:r>
-                        <a:rPr lang="en-US" sz="1100" dirty="0">
+                        <a:rPr lang="en-US" sz="1050" dirty="0">
                           <a:solidFill>
                             <a:srgbClr val="16232E"/>
                           </a:solidFill>
@@ -16814,9 +16814,9 @@
                           <a:ea typeface="Calibri" pitchFamily="34" charset="-122"/>
                           <a:cs typeface="Calibri" pitchFamily="34" charset="-120"/>
                         </a:rPr>
-                        <a:t>OAT (205)</a:t>
+                        <a:t>Technical (204)</a:t>
                       </a:r>
-                      <a:endParaRPr lang="en-US" sz="1100" dirty="0">
+                      <a:endParaRPr lang="en-US" sz="1050" dirty="0">
                         <a:latin typeface="Calibri" charset="0"/>
                         <a:ea typeface="Calibri" charset="0"/>
                         <a:cs typeface="Calibri" charset="0"/>
@@ -16874,7 +16874,7 @@
                         <a:buNone/>
                       </a:pPr>
                       <a:r>
-                        <a:rPr lang="en-US" sz="1100" dirty="0">
+                        <a:rPr lang="en-US" sz="1050" dirty="0">
                           <a:solidFill>
                             <a:srgbClr val="16232E"/>
                           </a:solidFill>
@@ -16882,9 +16882,9 @@
                           <a:ea typeface="Calibri" pitchFamily="34" charset="-122"/>
                           <a:cs typeface="Calibri" pitchFamily="34" charset="-120"/>
                         </a:rPr>
-                        <a:t>370,229.11</a:t>
+                        <a:t>2,224,672.79</a:t>
                       </a:r>
-                      <a:endParaRPr lang="en-US" sz="1100" dirty="0">
+                      <a:endParaRPr lang="en-US" sz="1050" dirty="0">
                         <a:latin typeface="Calibri" charset="0"/>
                         <a:ea typeface="Calibri" charset="0"/>
                         <a:cs typeface="Calibri" charset="0"/>
@@ -16942,7 +16942,7 @@
                         <a:buNone/>
                       </a:pPr>
                       <a:r>
-                        <a:rPr lang="en-US" sz="1100" dirty="0">
+                        <a:rPr lang="en-US" sz="1050" dirty="0">
                           <a:solidFill>
                             <a:srgbClr val="16232E"/>
                           </a:solidFill>
@@ -16950,9 +16950,9 @@
                           <a:ea typeface="Calibri" pitchFamily="34" charset="-122"/>
                           <a:cs typeface="Calibri" pitchFamily="34" charset="-120"/>
                         </a:rPr>
-                        <a:t>369,479.11</a:t>
+                        <a:t>2,224,672.81</a:t>
                       </a:r>
-                      <a:endParaRPr lang="en-US" sz="1100" dirty="0">
+                      <a:endParaRPr lang="en-US" sz="1050" dirty="0">
                         <a:latin typeface="Calibri" charset="0"/>
                         <a:ea typeface="Calibri" charset="0"/>
                         <a:cs typeface="Calibri" charset="0"/>
@@ -17010,17 +17010,17 @@
                         <a:buNone/>
                       </a:pPr>
                       <a:r>
-                        <a:rPr lang="en-US" sz="1100" b="1" dirty="0">
+                        <a:rPr lang="en-US" sz="1050" b="1" dirty="0">
                           <a:solidFill>
-                            <a:srgbClr val="9A6206"/>
+                            <a:srgbClr val="1B7A4F"/>
                           </a:solidFill>
                           <a:latin typeface="Calibri" pitchFamily="34" charset="0"/>
                           <a:ea typeface="Calibri" pitchFamily="34" charset="-122"/>
                           <a:cs typeface="Calibri" pitchFamily="34" charset="-120"/>
                         </a:rPr>
-                        <a:t>750.00</a:t>
+                        <a:t>(0.02)</a:t>
                       </a:r>
-                      <a:endParaRPr lang="en-US" sz="1100" dirty="0">
+                      <a:endParaRPr lang="en-US" sz="1050" dirty="0">
                         <a:latin typeface="Calibri" charset="0"/>
                         <a:ea typeface="Calibri" charset="0"/>
                         <a:cs typeface="Calibri" charset="0"/>
@@ -17070,7 +17070,7 @@
                   </a:tcPr>
                 </a:tc>
               </a:tr>
-              <a:tr h="283464">
+              <a:tr h="256032">
                 <a:tc>
                   <a:txBody>
                     <a:bodyPr/>
@@ -17080,7 +17080,7 @@
                         <a:buNone/>
                       </a:pPr>
                       <a:r>
-                        <a:rPr lang="en-US" sz="1100" dirty="0">
+                        <a:rPr lang="en-US" sz="1050" dirty="0">
                           <a:solidFill>
                             <a:srgbClr val="16232E"/>
                           </a:solidFill>
@@ -17088,9 +17088,9 @@
                           <a:ea typeface="Calibri" pitchFamily="34" charset="-122"/>
                           <a:cs typeface="Calibri" pitchFamily="34" charset="-120"/>
                         </a:rPr>
-                        <a:t>Technical Assistants (206)</a:t>
+                        <a:t>OAT (205)</a:t>
                       </a:r>
-                      <a:endParaRPr lang="en-US" sz="1100" dirty="0">
+                      <a:endParaRPr lang="en-US" sz="1050" dirty="0">
                         <a:latin typeface="Calibri" charset="0"/>
                         <a:ea typeface="Calibri" charset="0"/>
                         <a:cs typeface="Calibri" charset="0"/>
@@ -17148,7 +17148,7 @@
                         <a:buNone/>
                       </a:pPr>
                       <a:r>
-                        <a:rPr lang="en-US" sz="1100" dirty="0">
+                        <a:rPr lang="en-US" sz="1050" dirty="0">
                           <a:solidFill>
                             <a:srgbClr val="16232E"/>
                           </a:solidFill>
@@ -17156,9 +17156,9 @@
                           <a:ea typeface="Calibri" pitchFamily="34" charset="-122"/>
                           <a:cs typeface="Calibri" pitchFamily="34" charset="-120"/>
                         </a:rPr>
-                        <a:t>620,301.93</a:t>
+                        <a:t>369,479.11</a:t>
                       </a:r>
-                      <a:endParaRPr lang="en-US" sz="1100" dirty="0">
+                      <a:endParaRPr lang="en-US" sz="1050" dirty="0">
                         <a:latin typeface="Calibri" charset="0"/>
                         <a:ea typeface="Calibri" charset="0"/>
                         <a:cs typeface="Calibri" charset="0"/>
@@ -17216,7 +17216,7 @@
                         <a:buNone/>
                       </a:pPr>
                       <a:r>
-                        <a:rPr lang="en-US" sz="1100" dirty="0">
+                        <a:rPr lang="en-US" sz="1050" dirty="0">
                           <a:solidFill>
                             <a:srgbClr val="16232E"/>
                           </a:solidFill>
@@ -17224,9 +17224,9 @@
                           <a:ea typeface="Calibri" pitchFamily="34" charset="-122"/>
                           <a:cs typeface="Calibri" pitchFamily="34" charset="-120"/>
                         </a:rPr>
-                        <a:t>622,101.92</a:t>
+                        <a:t>369,479.11</a:t>
                       </a:r>
-                      <a:endParaRPr lang="en-US" sz="1100" dirty="0">
+                      <a:endParaRPr lang="en-US" sz="1050" dirty="0">
                         <a:latin typeface="Calibri" charset="0"/>
                         <a:ea typeface="Calibri" charset="0"/>
                         <a:cs typeface="Calibri" charset="0"/>
@@ -17284,17 +17284,17 @@
                         <a:buNone/>
                       </a:pPr>
                       <a:r>
-                        <a:rPr lang="en-US" sz="1100" b="1" dirty="0">
+                        <a:rPr lang="en-US" sz="1050" b="1" dirty="0">
                           <a:solidFill>
-                            <a:srgbClr val="9A6206"/>
+                            <a:srgbClr val="1B7A4F"/>
                           </a:solidFill>
                           <a:latin typeface="Calibri" pitchFamily="34" charset="0"/>
                           <a:ea typeface="Calibri" pitchFamily="34" charset="-122"/>
                           <a:cs typeface="Calibri" pitchFamily="34" charset="-120"/>
                         </a:rPr>
-                        <a:t>(1,799.99)</a:t>
+                        <a:t>—</a:t>
                       </a:r>
-                      <a:endParaRPr lang="en-US" sz="1100" dirty="0">
+                      <a:endParaRPr lang="en-US" sz="1050" dirty="0">
                         <a:latin typeface="Calibri" charset="0"/>
                         <a:ea typeface="Calibri" charset="0"/>
                         <a:cs typeface="Calibri" charset="0"/>
@@ -17344,7 +17344,7 @@
                   </a:tcPr>
                 </a:tc>
               </a:tr>
-              <a:tr h="283464">
+              <a:tr h="256032">
                 <a:tc>
                   <a:txBody>
                     <a:bodyPr/>
@@ -17354,7 +17354,7 @@
                         <a:buNone/>
                       </a:pPr>
                       <a:r>
-                        <a:rPr lang="en-US" sz="1100" dirty="0">
+                        <a:rPr lang="en-US" sz="1050" dirty="0">
                           <a:solidFill>
                             <a:srgbClr val="16232E"/>
                           </a:solidFill>
@@ -17362,9 +17362,9 @@
                           <a:ea typeface="Calibri" pitchFamily="34" charset="-122"/>
                           <a:cs typeface="Calibri" pitchFamily="34" charset="-120"/>
                         </a:rPr>
-                        <a:t>Production (511)</a:t>
+                        <a:t>Technical Assistants (206)</a:t>
                       </a:r>
-                      <a:endParaRPr lang="en-US" sz="1100" dirty="0">
+                      <a:endParaRPr lang="en-US" sz="1050" dirty="0">
                         <a:latin typeface="Calibri" charset="0"/>
                         <a:ea typeface="Calibri" charset="0"/>
                         <a:cs typeface="Calibri" charset="0"/>
@@ -17422,7 +17422,7 @@
                         <a:buNone/>
                       </a:pPr>
                       <a:r>
-                        <a:rPr lang="en-US" sz="1100" dirty="0">
+                        <a:rPr lang="en-US" sz="1050" dirty="0">
                           <a:solidFill>
                             <a:srgbClr val="16232E"/>
                           </a:solidFill>
@@ -17430,9 +17430,9 @@
                           <a:ea typeface="Calibri" pitchFamily="34" charset="-122"/>
                           <a:cs typeface="Calibri" pitchFamily="34" charset="-120"/>
                         </a:rPr>
-                        <a:t>949,037.01</a:t>
+                        <a:t>622,101.93</a:t>
                       </a:r>
-                      <a:endParaRPr lang="en-US" sz="1100" dirty="0">
+                      <a:endParaRPr lang="en-US" sz="1050" dirty="0">
                         <a:latin typeface="Calibri" charset="0"/>
                         <a:ea typeface="Calibri" charset="0"/>
                         <a:cs typeface="Calibri" charset="0"/>
@@ -17490,7 +17490,7 @@
                         <a:buNone/>
                       </a:pPr>
                       <a:r>
-                        <a:rPr lang="en-US" sz="1100" dirty="0">
+                        <a:rPr lang="en-US" sz="1050" dirty="0">
                           <a:solidFill>
                             <a:srgbClr val="16232E"/>
                           </a:solidFill>
@@ -17498,9 +17498,9 @@
                           <a:ea typeface="Calibri" pitchFamily="34" charset="-122"/>
                           <a:cs typeface="Calibri" pitchFamily="34" charset="-120"/>
                         </a:rPr>
-                        <a:t>949,037.08</a:t>
+                        <a:t>622,101.92</a:t>
                       </a:r>
-                      <a:endParaRPr lang="en-US" sz="1100" dirty="0">
+                      <a:endParaRPr lang="en-US" sz="1050" dirty="0">
                         <a:latin typeface="Calibri" charset="0"/>
                         <a:ea typeface="Calibri" charset="0"/>
                         <a:cs typeface="Calibri" charset="0"/>
@@ -17558,7 +17558,7 @@
                         <a:buNone/>
                       </a:pPr>
                       <a:r>
-                        <a:rPr lang="en-US" sz="1100" b="1" dirty="0">
+                        <a:rPr lang="en-US" sz="1050" b="1" dirty="0">
                           <a:solidFill>
                             <a:srgbClr val="1B7A4F"/>
                           </a:solidFill>
@@ -17566,9 +17566,9 @@
                           <a:ea typeface="Calibri" pitchFamily="34" charset="-122"/>
                           <a:cs typeface="Calibri" pitchFamily="34" charset="-120"/>
                         </a:rPr>
-                        <a:t>(0.07)</a:t>
+                        <a:t>0.01</a:t>
                       </a:r>
-                      <a:endParaRPr lang="en-US" sz="1100" dirty="0">
+                      <a:endParaRPr lang="en-US" sz="1050" dirty="0">
                         <a:latin typeface="Calibri" charset="0"/>
                         <a:ea typeface="Calibri" charset="0"/>
                         <a:cs typeface="Calibri" charset="0"/>
@@ -17618,7 +17618,7 @@
                   </a:tcPr>
                 </a:tc>
               </a:tr>
-              <a:tr h="283464">
+              <a:tr h="256032">
                 <a:tc>
                   <a:txBody>
                     <a:bodyPr/>
@@ -17628,7 +17628,7 @@
                         <a:buNone/>
                       </a:pPr>
                       <a:r>
-                        <a:rPr lang="en-US" sz="1100" dirty="0">
+                        <a:rPr lang="en-US" sz="1050" dirty="0">
                           <a:solidFill>
                             <a:srgbClr val="16232E"/>
                           </a:solidFill>
@@ -17636,9 +17636,9 @@
                           <a:ea typeface="Calibri" pitchFamily="34" charset="-122"/>
                           <a:cs typeface="Calibri" pitchFamily="34" charset="-120"/>
                         </a:rPr>
-                        <a:t>Production Overhead (512)</a:t>
+                        <a:t>Production (511)</a:t>
                       </a:r>
-                      <a:endParaRPr lang="en-US" sz="1100" dirty="0">
+                      <a:endParaRPr lang="en-US" sz="1050" dirty="0">
                         <a:latin typeface="Calibri" charset="0"/>
                         <a:ea typeface="Calibri" charset="0"/>
                         <a:cs typeface="Calibri" charset="0"/>
@@ -17696,7 +17696,7 @@
                         <a:buNone/>
                       </a:pPr>
                       <a:r>
-                        <a:rPr lang="en-US" sz="1100" dirty="0">
+                        <a:rPr lang="en-US" sz="1050" dirty="0">
                           <a:solidFill>
                             <a:srgbClr val="16232E"/>
                           </a:solidFill>
@@ -17704,9 +17704,9 @@
                           <a:ea typeface="Calibri" pitchFamily="34" charset="-122"/>
                           <a:cs typeface="Calibri" pitchFamily="34" charset="-120"/>
                         </a:rPr>
-                        <a:t>646,762.93</a:t>
+                        <a:t>949,037.01</a:t>
                       </a:r>
-                      <a:endParaRPr lang="en-US" sz="1100" dirty="0">
+                      <a:endParaRPr lang="en-US" sz="1050" dirty="0">
                         <a:latin typeface="Calibri" charset="0"/>
                         <a:ea typeface="Calibri" charset="0"/>
                         <a:cs typeface="Calibri" charset="0"/>
@@ -17764,7 +17764,7 @@
                         <a:buNone/>
                       </a:pPr>
                       <a:r>
-                        <a:rPr lang="en-US" sz="1100" dirty="0">
+                        <a:rPr lang="en-US" sz="1050" dirty="0">
                           <a:solidFill>
                             <a:srgbClr val="16232E"/>
                           </a:solidFill>
@@ -17772,9 +17772,9 @@
                           <a:ea typeface="Calibri" pitchFamily="34" charset="-122"/>
                           <a:cs typeface="Calibri" pitchFamily="34" charset="-120"/>
                         </a:rPr>
-                        <a:t>646,762.92</a:t>
+                        <a:t>949,037.08</a:t>
                       </a:r>
-                      <a:endParaRPr lang="en-US" sz="1100" dirty="0">
+                      <a:endParaRPr lang="en-US" sz="1050" dirty="0">
                         <a:latin typeface="Calibri" charset="0"/>
                         <a:ea typeface="Calibri" charset="0"/>
                         <a:cs typeface="Calibri" charset="0"/>
@@ -17832,7 +17832,7 @@
                         <a:buNone/>
                       </a:pPr>
                       <a:r>
-                        <a:rPr lang="en-US" sz="1100" b="1" dirty="0">
+                        <a:rPr lang="en-US" sz="1050" b="1" dirty="0">
                           <a:solidFill>
                             <a:srgbClr val="1B7A4F"/>
                           </a:solidFill>
@@ -17840,9 +17840,9 @@
                           <a:ea typeface="Calibri" pitchFamily="34" charset="-122"/>
                           <a:cs typeface="Calibri" pitchFamily="34" charset="-120"/>
                         </a:rPr>
-                        <a:t>0.01</a:t>
+                        <a:t>(0.07)</a:t>
                       </a:r>
-                      <a:endParaRPr lang="en-US" sz="1100" dirty="0">
+                      <a:endParaRPr lang="en-US" sz="1050" dirty="0">
                         <a:latin typeface="Calibri" charset="0"/>
                         <a:ea typeface="Calibri" charset="0"/>
                         <a:cs typeface="Calibri" charset="0"/>
@@ -17892,7 +17892,7 @@
                   </a:tcPr>
                 </a:tc>
               </a:tr>
-              <a:tr h="283464">
+              <a:tr h="256032">
                 <a:tc>
                   <a:txBody>
                     <a:bodyPr/>
@@ -17902,7 +17902,7 @@
                         <a:buNone/>
                       </a:pPr>
                       <a:r>
-                        <a:rPr lang="en-US" sz="1100" b="1" dirty="0">
+                        <a:rPr lang="en-US" sz="1050" dirty="0">
                           <a:solidFill>
                             <a:srgbClr val="16232E"/>
                           </a:solidFill>
@@ -17910,9 +17910,9 @@
                           <a:ea typeface="Calibri" pitchFamily="34" charset="-122"/>
                           <a:cs typeface="Calibri" pitchFamily="34" charset="-120"/>
                         </a:rPr>
-                        <a:t>Total</a:t>
+                        <a:t>Production Overhead (512)</a:t>
                       </a:r>
-                      <a:endParaRPr lang="en-US" sz="1100" dirty="0">
+                      <a:endParaRPr lang="en-US" sz="1050" dirty="0">
                         <a:latin typeface="Calibri" charset="0"/>
                         <a:ea typeface="Calibri" charset="0"/>
                         <a:cs typeface="Calibri" charset="0"/>
@@ -17970,7 +17970,7 @@
                         <a:buNone/>
                       </a:pPr>
                       <a:r>
-                        <a:rPr lang="en-US" sz="1100" b="1" dirty="0">
+                        <a:rPr lang="en-US" sz="1050" dirty="0">
                           <a:solidFill>
                             <a:srgbClr val="16232E"/>
                           </a:solidFill>
@@ -17978,9 +17978,9 @@
                           <a:ea typeface="Calibri" pitchFamily="34" charset="-122"/>
                           <a:cs typeface="Calibri" pitchFamily="34" charset="-120"/>
                         </a:rPr>
-                        <a:t>6,458,620.25</a:t>
+                        <a:t>398,051.75</a:t>
                       </a:r>
-                      <a:endParaRPr lang="en-US" sz="1100" dirty="0">
+                      <a:endParaRPr lang="en-US" sz="1050" dirty="0">
                         <a:latin typeface="Calibri" charset="0"/>
                         <a:ea typeface="Calibri" charset="0"/>
                         <a:cs typeface="Calibri" charset="0"/>
@@ -18038,7 +18038,7 @@
                         <a:buNone/>
                       </a:pPr>
                       <a:r>
-                        <a:rPr lang="en-US" sz="1100" b="1" dirty="0">
+                        <a:rPr lang="en-US" sz="1050" dirty="0">
                           <a:solidFill>
                             <a:srgbClr val="16232E"/>
                           </a:solidFill>
@@ -18046,9 +18046,9 @@
                           <a:ea typeface="Calibri" pitchFamily="34" charset="-122"/>
                           <a:cs typeface="Calibri" pitchFamily="34" charset="-120"/>
                         </a:rPr>
-                        <a:t>6,458,620.33</a:t>
+                        <a:t>398,051.75</a:t>
                       </a:r>
-                      <a:endParaRPr lang="en-US" sz="1100" dirty="0">
+                      <a:endParaRPr lang="en-US" sz="1050" dirty="0">
                         <a:latin typeface="Calibri" charset="0"/>
                         <a:ea typeface="Calibri" charset="0"/>
                         <a:cs typeface="Calibri" charset="0"/>
@@ -18106,7 +18106,7 @@
                         <a:buNone/>
                       </a:pPr>
                       <a:r>
-                        <a:rPr lang="en-US" sz="1100" b="1" dirty="0">
+                        <a:rPr lang="en-US" sz="1050" b="1" dirty="0">
                           <a:solidFill>
                             <a:srgbClr val="1B7A4F"/>
                           </a:solidFill>
@@ -18114,9 +18114,283 @@
                           <a:ea typeface="Calibri" pitchFamily="34" charset="-122"/>
                           <a:cs typeface="Calibri" pitchFamily="34" charset="-120"/>
                         </a:rPr>
-                        <a:t>(0.08)</a:t>
+                        <a:t>—</a:t>
                       </a:r>
-                      <a:endParaRPr lang="en-US" sz="1100" dirty="0">
+                      <a:endParaRPr lang="en-US" sz="1050" dirty="0">
+                        <a:latin typeface="Calibri" charset="0"/>
+                        <a:ea typeface="Calibri" charset="0"/>
+                        <a:cs typeface="Calibri" charset="0"/>
+                      </a:endParaRPr>
+                    </a:p>
+                  </a:txBody>
+                  <a:tcPr marL="73152" marR="73152" marT="36576" marB="36576" anchor="ctr">
+                    <a:lnL w="6350" cap="flat" cmpd="sng" algn="ctr">
+                      <a:solidFill>
+                        <a:srgbClr val="D8E4EE"/>
+                      </a:solidFill>
+                      <a:prstDash val="solid"/>
+                      <a:round/>
+                      <a:headEnd type="none" w="med" len="med"/>
+                      <a:tailEnd type="none" w="med" len="med"/>
+                    </a:lnL>
+                    <a:lnR w="6350" cap="flat" cmpd="sng" algn="ctr">
+                      <a:solidFill>
+                        <a:srgbClr val="D8E4EE"/>
+                      </a:solidFill>
+                      <a:prstDash val="solid"/>
+                      <a:round/>
+                      <a:headEnd type="none" w="med" len="med"/>
+                      <a:tailEnd type="none" w="med" len="med"/>
+                    </a:lnR>
+                    <a:lnT w="6350" cap="flat" cmpd="sng" algn="ctr">
+                      <a:solidFill>
+                        <a:srgbClr val="D8E4EE"/>
+                      </a:solidFill>
+                      <a:prstDash val="solid"/>
+                      <a:round/>
+                      <a:headEnd type="none" w="med" len="med"/>
+                      <a:tailEnd type="none" w="med" len="med"/>
+                    </a:lnT>
+                    <a:lnB w="6350" cap="flat" cmpd="sng" algn="ctr">
+                      <a:solidFill>
+                        <a:srgbClr val="D8E4EE"/>
+                      </a:solidFill>
+                      <a:prstDash val="solid"/>
+                      <a:round/>
+                      <a:headEnd type="none" w="med" len="med"/>
+                      <a:tailEnd type="none" w="med" len="med"/>
+                    </a:lnB>
+                    <a:solidFill>
+                      <a:srgbClr val="FFFFFF"/>
+                    </a:solidFill>
+                  </a:tcPr>
+                </a:tc>
+              </a:tr>
+              <a:tr h="256032">
+                <a:tc>
+                  <a:txBody>
+                    <a:bodyPr/>
+                    <a:lstStyle/>
+                    <a:p>
+                      <a:pPr indent="0" marL="0">
+                        <a:buNone/>
+                      </a:pPr>
+                      <a:r>
+                        <a:rPr lang="en-US" sz="1050" b="1" dirty="0">
+                          <a:solidFill>
+                            <a:srgbClr val="16232E"/>
+                          </a:solidFill>
+                          <a:latin typeface="Calibri" pitchFamily="34" charset="0"/>
+                          <a:ea typeface="Calibri" pitchFamily="34" charset="-122"/>
+                          <a:cs typeface="Calibri" pitchFamily="34" charset="-120"/>
+                        </a:rPr>
+                        <a:t>Total</a:t>
+                      </a:r>
+                      <a:endParaRPr lang="en-US" sz="1050" dirty="0">
+                        <a:latin typeface="Calibri" charset="0"/>
+                        <a:ea typeface="Calibri" charset="0"/>
+                        <a:cs typeface="Calibri" charset="0"/>
+                      </a:endParaRPr>
+                    </a:p>
+                  </a:txBody>
+                  <a:tcPr marL="73152" marR="73152" marT="36576" marB="36576" anchor="ctr">
+                    <a:lnL w="6350" cap="flat" cmpd="sng" algn="ctr">
+                      <a:solidFill>
+                        <a:srgbClr val="D8E4EE"/>
+                      </a:solidFill>
+                      <a:prstDash val="solid"/>
+                      <a:round/>
+                      <a:headEnd type="none" w="med" len="med"/>
+                      <a:tailEnd type="none" w="med" len="med"/>
+                    </a:lnL>
+                    <a:lnR w="6350" cap="flat" cmpd="sng" algn="ctr">
+                      <a:solidFill>
+                        <a:srgbClr val="D8E4EE"/>
+                      </a:solidFill>
+                      <a:prstDash val="solid"/>
+                      <a:round/>
+                      <a:headEnd type="none" w="med" len="med"/>
+                      <a:tailEnd type="none" w="med" len="med"/>
+                    </a:lnR>
+                    <a:lnT w="6350" cap="flat" cmpd="sng" algn="ctr">
+                      <a:solidFill>
+                        <a:srgbClr val="D8E4EE"/>
+                      </a:solidFill>
+                      <a:prstDash val="solid"/>
+                      <a:round/>
+                      <a:headEnd type="none" w="med" len="med"/>
+                      <a:tailEnd type="none" w="med" len="med"/>
+                    </a:lnT>
+                    <a:lnB w="6350" cap="flat" cmpd="sng" algn="ctr">
+                      <a:solidFill>
+                        <a:srgbClr val="D8E4EE"/>
+                      </a:solidFill>
+                      <a:prstDash val="solid"/>
+                      <a:round/>
+                      <a:headEnd type="none" w="med" len="med"/>
+                      <a:tailEnd type="none" w="med" len="med"/>
+                    </a:lnB>
+                    <a:solidFill>
+                      <a:srgbClr val="FFFFFF"/>
+                    </a:solidFill>
+                  </a:tcPr>
+                </a:tc>
+                <a:tc>
+                  <a:txBody>
+                    <a:bodyPr/>
+                    <a:lstStyle/>
+                    <a:p>
+                      <a:pPr algn="r" indent="0" marL="0">
+                        <a:buNone/>
+                      </a:pPr>
+                      <a:r>
+                        <a:rPr lang="en-US" sz="1050" b="1" dirty="0">
+                          <a:solidFill>
+                            <a:srgbClr val="16232E"/>
+                          </a:solidFill>
+                          <a:latin typeface="Calibri" pitchFamily="34" charset="0"/>
+                          <a:ea typeface="Calibri" pitchFamily="34" charset="-122"/>
+                          <a:cs typeface="Calibri" pitchFamily="34" charset="-120"/>
+                        </a:rPr>
+                        <a:t>6,458,620.24</a:t>
+                      </a:r>
+                      <a:endParaRPr lang="en-US" sz="1050" dirty="0">
+                        <a:latin typeface="Calibri" charset="0"/>
+                        <a:ea typeface="Calibri" charset="0"/>
+                        <a:cs typeface="Calibri" charset="0"/>
+                      </a:endParaRPr>
+                    </a:p>
+                  </a:txBody>
+                  <a:tcPr marL="73152" marR="73152" marT="36576" marB="36576" anchor="ctr">
+                    <a:lnL w="6350" cap="flat" cmpd="sng" algn="ctr">
+                      <a:solidFill>
+                        <a:srgbClr val="D8E4EE"/>
+                      </a:solidFill>
+                      <a:prstDash val="solid"/>
+                      <a:round/>
+                      <a:headEnd type="none" w="med" len="med"/>
+                      <a:tailEnd type="none" w="med" len="med"/>
+                    </a:lnL>
+                    <a:lnR w="6350" cap="flat" cmpd="sng" algn="ctr">
+                      <a:solidFill>
+                        <a:srgbClr val="D8E4EE"/>
+                      </a:solidFill>
+                      <a:prstDash val="solid"/>
+                      <a:round/>
+                      <a:headEnd type="none" w="med" len="med"/>
+                      <a:tailEnd type="none" w="med" len="med"/>
+                    </a:lnR>
+                    <a:lnT w="6350" cap="flat" cmpd="sng" algn="ctr">
+                      <a:solidFill>
+                        <a:srgbClr val="D8E4EE"/>
+                      </a:solidFill>
+                      <a:prstDash val="solid"/>
+                      <a:round/>
+                      <a:headEnd type="none" w="med" len="med"/>
+                      <a:tailEnd type="none" w="med" len="med"/>
+                    </a:lnT>
+                    <a:lnB w="6350" cap="flat" cmpd="sng" algn="ctr">
+                      <a:solidFill>
+                        <a:srgbClr val="D8E4EE"/>
+                      </a:solidFill>
+                      <a:prstDash val="solid"/>
+                      <a:round/>
+                      <a:headEnd type="none" w="med" len="med"/>
+                      <a:tailEnd type="none" w="med" len="med"/>
+                    </a:lnB>
+                    <a:solidFill>
+                      <a:srgbClr val="FFFFFF"/>
+                    </a:solidFill>
+                  </a:tcPr>
+                </a:tc>
+                <a:tc>
+                  <a:txBody>
+                    <a:bodyPr/>
+                    <a:lstStyle/>
+                    <a:p>
+                      <a:pPr algn="r" indent="0" marL="0">
+                        <a:buNone/>
+                      </a:pPr>
+                      <a:r>
+                        <a:rPr lang="en-US" sz="1050" b="1" dirty="0">
+                          <a:solidFill>
+                            <a:srgbClr val="16232E"/>
+                          </a:solidFill>
+                          <a:latin typeface="Calibri" pitchFamily="34" charset="0"/>
+                          <a:ea typeface="Calibri" pitchFamily="34" charset="-122"/>
+                          <a:cs typeface="Calibri" pitchFamily="34" charset="-120"/>
+                        </a:rPr>
+                        <a:t>6,458,620.34</a:t>
+                      </a:r>
+                      <a:endParaRPr lang="en-US" sz="1050" dirty="0">
+                        <a:latin typeface="Calibri" charset="0"/>
+                        <a:ea typeface="Calibri" charset="0"/>
+                        <a:cs typeface="Calibri" charset="0"/>
+                      </a:endParaRPr>
+                    </a:p>
+                  </a:txBody>
+                  <a:tcPr marL="73152" marR="73152" marT="36576" marB="36576" anchor="ctr">
+                    <a:lnL w="6350" cap="flat" cmpd="sng" algn="ctr">
+                      <a:solidFill>
+                        <a:srgbClr val="D8E4EE"/>
+                      </a:solidFill>
+                      <a:prstDash val="solid"/>
+                      <a:round/>
+                      <a:headEnd type="none" w="med" len="med"/>
+                      <a:tailEnd type="none" w="med" len="med"/>
+                    </a:lnL>
+                    <a:lnR w="6350" cap="flat" cmpd="sng" algn="ctr">
+                      <a:solidFill>
+                        <a:srgbClr val="D8E4EE"/>
+                      </a:solidFill>
+                      <a:prstDash val="solid"/>
+                      <a:round/>
+                      <a:headEnd type="none" w="med" len="med"/>
+                      <a:tailEnd type="none" w="med" len="med"/>
+                    </a:lnR>
+                    <a:lnT w="6350" cap="flat" cmpd="sng" algn="ctr">
+                      <a:solidFill>
+                        <a:srgbClr val="D8E4EE"/>
+                      </a:solidFill>
+                      <a:prstDash val="solid"/>
+                      <a:round/>
+                      <a:headEnd type="none" w="med" len="med"/>
+                      <a:tailEnd type="none" w="med" len="med"/>
+                    </a:lnT>
+                    <a:lnB w="6350" cap="flat" cmpd="sng" algn="ctr">
+                      <a:solidFill>
+                        <a:srgbClr val="D8E4EE"/>
+                      </a:solidFill>
+                      <a:prstDash val="solid"/>
+                      <a:round/>
+                      <a:headEnd type="none" w="med" len="med"/>
+                      <a:tailEnd type="none" w="med" len="med"/>
+                    </a:lnB>
+                    <a:solidFill>
+                      <a:srgbClr val="FFFFFF"/>
+                    </a:solidFill>
+                  </a:tcPr>
+                </a:tc>
+                <a:tc>
+                  <a:txBody>
+                    <a:bodyPr/>
+                    <a:lstStyle/>
+                    <a:p>
+                      <a:pPr algn="r" indent="0" marL="0">
+                        <a:buNone/>
+                      </a:pPr>
+                      <a:r>
+                        <a:rPr lang="en-US" sz="1050" b="1" dirty="0">
+                          <a:solidFill>
+                            <a:srgbClr val="1B7A4F"/>
+                          </a:solidFill>
+                          <a:latin typeface="Calibri" pitchFamily="34" charset="0"/>
+                          <a:ea typeface="Calibri" pitchFamily="34" charset="-122"/>
+                          <a:cs typeface="Calibri" pitchFamily="34" charset="-120"/>
+                        </a:rPr>
+                        <a:t>(0.10)</a:t>
+                      </a:r>
+                      <a:endParaRPr lang="en-US" sz="1050" dirty="0">
                         <a:latin typeface="Calibri" charset="0"/>
                         <a:ea typeface="Calibri" charset="0"/>
                         <a:cs typeface="Calibri" charset="0"/>
@@ -18287,11 +18561,11 @@
         <p:spPr>
           <a:xfrm>
             <a:off x="7370064" y="3291840"/>
-            <a:ext cx="4251960" cy="1737360"/>
+            <a:ext cx="4251960" cy="1773936"/>
           </a:xfrm>
           <a:prstGeom prst="roundRect">
             <a:avLst>
-              <a:gd name="adj" fmla="val 4211"/>
+              <a:gd name="adj" fmla="val 4124"/>
             </a:avLst>
           </a:prstGeom>
           <a:solidFill>
@@ -18338,7 +18612,7 @@
                 <a:ea typeface="Calibri" pitchFamily="34" charset="-122"/>
                 <a:cs typeface="Calibri" pitchFamily="34" charset="-120"/>
               </a:rPr>
-              <a:t>Three centres differ — and cancel out</a:t>
+              <a:t>And it found something</a:t>
             </a:r>
             <a:endParaRPr lang="en-US" sz="1250" dirty="0"/>
           </a:p>
@@ -18353,7 +18627,7 @@
         <p:spPr>
           <a:xfrm>
             <a:off x="7607808" y="3730752"/>
-            <a:ext cx="3794760" cy="1225296"/>
+            <a:ext cx="3794760" cy="1261872"/>
           </a:xfrm>
           <a:prstGeom prst="rect">
             <a:avLst/>
@@ -18380,7 +18654,7 @@
                 <a:ea typeface="Calibri" pitchFamily="34" charset="-122"/>
                 <a:cs typeface="Calibri" pitchFamily="34" charset="-120"/>
               </a:rPr>
-              <a:t>204 and 205 are under by KES 1,799.98 between them; 206 is over by KES 1,799.99. They cancel to a cent, so the money is right — it is simply filed under a different cost centre in one of the two records.</a:t>
+              <a:t>Three centres first differed by amounts that cancelled to a single cent — 204 and 205 short by KES 1,799.98 between them, 206 over by KES 1,799.99.</a:t>
             </a:r>
             <a:endParaRPr lang="en-US" sz="1050" dirty="0"/>
           </a:p>
@@ -18409,7 +18683,7 @@
                 <a:ea typeface="Calibri" pitchFamily="34" charset="-122"/>
                 <a:cs typeface="Calibri" pitchFamily="34" charset="-120"/>
               </a:rPr>
-              <a:t>One answer settles it: which cost centre should those staff sit in?</a:t>
+              <a:t>Money that nets to zero is not a calculation difference, it is misfiled. It traced to a cell range in the workbook picking up the wrong rows. Corrected, all seven agree.</a:t>
             </a:r>
             <a:endParaRPr lang="en-US" sz="1050" dirty="0"/>
           </a:p>
@@ -18478,7 +18752,7 @@
                 <a:ea typeface="Calibri" pitchFamily="34" charset="-122"/>
                 <a:cs typeface="Calibri" pitchFamily="34" charset="-120"/>
               </a:rPr>
-              <a:t>The total still lands.  </a:t>
+              <a:t>Every cost centre now agrees.  </a:t>
             </a:r>
             <a:pPr indent="0" marL="0">
               <a:lnSpc>
@@ -18495,7 +18769,7 @@
                 <a:ea typeface="Calibri" pitchFamily="34" charset="-122"/>
                 <a:cs typeface="Calibri" pitchFamily="34" charset="-120"/>
               </a:rPr>
-              <a:t>Your workbook reconciles to KES 6,458,620.25. Nexora independently arrived at KES 6,458,620.33 — eight cents apart on six and a half million.</a:t>
+              <a:t>Seven lines, the largest difference seven cents, on a payroll of KES 6.46 million — including the manager split across two centres.</a:t>
             </a:r>
             <a:endParaRPr lang="en-US" sz="1250" dirty="0"/>
           </a:p>

--- a/Nexora-Payroll-Presentation.pptx
+++ b/Nexora-Payroll-Presentation.pptx
@@ -3271,7 +3271,7 @@
                 <a:ea typeface="Calibri" pitchFamily="34" charset="-122"/>
                 <a:cs typeface="Calibri" pitchFamily="34" charset="-120"/>
               </a:rPr>
-              <a:t>Every net payment with name, bank and account number.</a:t>
+              <a:t>Every net payment with the name, bank and account number already on file.</a:t>
             </a:r>
             <a:endParaRPr lang="en-US" sz="1050" dirty="0"/>
           </a:p>
@@ -3396,7 +3396,7 @@
                 <a:ea typeface="Cambria" pitchFamily="34" charset="-122"/>
                 <a:cs typeface="Cambria" pitchFamily="34" charset="-120"/>
               </a:rPr>
-              <a:t>iTax export</a:t>
+              <a:t>iTax PAYE export</a:t>
             </a:r>
             <a:endParaRPr lang="en-US" sz="1450" dirty="0"/>
           </a:p>
@@ -3438,7 +3438,7 @@
                 <a:ea typeface="Calibri" pitchFamily="34" charset="-122"/>
                 <a:cs typeface="Calibri" pitchFamily="34" charset="-120"/>
               </a:rPr>
-              <a:t>The PAYE return laid out for KRA submission.</a:t>
+              <a:t>The PAYE return, ready for KRA submission.</a:t>
             </a:r>
             <a:endParaRPr lang="en-US" sz="1050" dirty="0"/>
           </a:p>
@@ -3772,7 +3772,7 @@
                 <a:ea typeface="Calibri" pitchFamily="34" charset="-122"/>
                 <a:cs typeface="Calibri" pitchFamily="34" charset="-120"/>
               </a:rPr>
-              <a:t>All 40 columns, plus gross, PAYE and net by cost centre.</a:t>
+              <a:t>All 40 columns, plus gross, fringe and cash cost by cost centre.</a:t>
             </a:r>
             <a:endParaRPr lang="en-US" sz="1050" dirty="0"/>
           </a:p>
@@ -5329,8 +5329,8 @@
         </p:nvSpPr>
         <p:spPr>
           <a:xfrm>
-            <a:off x="841248" y="2286000"/>
-            <a:ext cx="4937760" cy="384048"/>
+            <a:off x="841248" y="2249424"/>
+            <a:ext cx="4937760" cy="365760"/>
           </a:xfrm>
           <a:prstGeom prst="rect">
             <a:avLst/>
@@ -5344,13 +5344,13 @@
           <a:p>
             <a:pPr marL="342900" indent="-342900">
               <a:lnSpc>
-                <a:spcPts val="1400"/>
+                <a:spcPts val="1350"/>
               </a:lnSpc>
               <a:buSzPct val="100000"/>
               <a:buChar char="•"/>
             </a:pPr>
             <a:r>
-              <a:rPr lang="en-US" sz="1050" dirty="0">
+              <a:rPr lang="en-US" sz="1000" dirty="0">
                 <a:solidFill>
                   <a:srgbClr val="D6E7F3"/>
                 </a:solidFill>
@@ -5360,7 +5360,7 @@
               </a:rPr>
               <a:t>Payroll engine matched to your November figures</a:t>
             </a:r>
-            <a:endParaRPr lang="en-US" sz="1050" dirty="0"/>
+            <a:endParaRPr lang="en-US" sz="1000" dirty="0"/>
           </a:p>
         </p:txBody>
       </p:sp>
@@ -5372,8 +5372,8 @@
         </p:nvSpPr>
         <p:spPr>
           <a:xfrm>
-            <a:off x="841248" y="2706624"/>
-            <a:ext cx="4937760" cy="384048"/>
+            <a:off x="841248" y="2633472"/>
+            <a:ext cx="4937760" cy="365760"/>
           </a:xfrm>
           <a:prstGeom prst="rect">
             <a:avLst/>
@@ -5387,13 +5387,13 @@
           <a:p>
             <a:pPr marL="342900" indent="-342900">
               <a:lnSpc>
-                <a:spcPts val="1400"/>
+                <a:spcPts val="1350"/>
               </a:lnSpc>
               <a:buSzPct val="100000"/>
               <a:buChar char="•"/>
             </a:pPr>
             <a:r>
-              <a:rPr lang="en-US" sz="1050" dirty="0">
+              <a:rPr lang="en-US" sz="1000" dirty="0">
                 <a:solidFill>
                   <a:srgbClr val="D6E7F3"/>
                 </a:solidFill>
@@ -5403,7 +5403,7 @@
               </a:rPr>
               <a:t>Payslips, P9s, register and cost-centre reports</a:t>
             </a:r>
-            <a:endParaRPr lang="en-US" sz="1050" dirty="0"/>
+            <a:endParaRPr lang="en-US" sz="1000" dirty="0"/>
           </a:p>
         </p:txBody>
       </p:sp>
@@ -5415,8 +5415,8 @@
         </p:nvSpPr>
         <p:spPr>
           <a:xfrm>
-            <a:off x="841248" y="3127248"/>
-            <a:ext cx="4937760" cy="384048"/>
+            <a:off x="841248" y="3017520"/>
+            <a:ext cx="4937760" cy="365760"/>
           </a:xfrm>
           <a:prstGeom prst="rect">
             <a:avLst/>
@@ -5430,13 +5430,13 @@
           <a:p>
             <a:pPr marL="342900" indent="-342900">
               <a:lnSpc>
-                <a:spcPts val="1400"/>
+                <a:spcPts val="1350"/>
               </a:lnSpc>
               <a:buSzPct val="100000"/>
               <a:buChar char="•"/>
             </a:pPr>
             <a:r>
-              <a:rPr lang="en-US" sz="1050" dirty="0">
+              <a:rPr lang="en-US" sz="1000" dirty="0">
                 <a:solidFill>
                   <a:srgbClr val="D6E7F3"/>
                 </a:solidFill>
@@ -5446,7 +5446,7 @@
               </a:rPr>
               <a:t>AX journal in your own upload format, balanced</a:t>
             </a:r>
-            <a:endParaRPr lang="en-US" sz="1050" dirty="0"/>
+            <a:endParaRPr lang="en-US" sz="1000" dirty="0"/>
           </a:p>
         </p:txBody>
       </p:sp>
@@ -5458,8 +5458,8 @@
         </p:nvSpPr>
         <p:spPr>
           <a:xfrm>
-            <a:off x="841248" y="3547872"/>
-            <a:ext cx="4937760" cy="384048"/>
+            <a:off x="841248" y="3401568"/>
+            <a:ext cx="4937760" cy="365760"/>
           </a:xfrm>
           <a:prstGeom prst="rect">
             <a:avLst/>
@@ -5473,13 +5473,13 @@
           <a:p>
             <a:pPr marL="342900" indent="-342900">
               <a:lnSpc>
-                <a:spcPts val="1400"/>
+                <a:spcPts val="1350"/>
               </a:lnSpc>
               <a:buSzPct val="100000"/>
               <a:buChar char="•"/>
             </a:pPr>
             <a:r>
-              <a:rPr lang="en-US" sz="1050" dirty="0">
+              <a:rPr lang="en-US" sz="1000" dirty="0">
                 <a:solidFill>
                   <a:srgbClr val="D6E7F3"/>
                 </a:solidFill>
@@ -5487,9 +5487,9 @@
                 <a:ea typeface="Calibri" pitchFamily="34" charset="-122"/>
                 <a:cs typeface="Calibri" pitchFamily="34" charset="-120"/>
               </a:rPr>
-              <a:t>Bank details loaded for all 46 employees</a:t>
+              <a:t>Bank batch file, with all 46 employees' details loaded</a:t>
             </a:r>
-            <a:endParaRPr lang="en-US" sz="1050" dirty="0"/>
+            <a:endParaRPr lang="en-US" sz="1000" dirty="0"/>
           </a:p>
         </p:txBody>
       </p:sp>
@@ -5501,8 +5501,8 @@
         </p:nvSpPr>
         <p:spPr>
           <a:xfrm>
-            <a:off x="841248" y="3968496"/>
-            <a:ext cx="4937760" cy="384048"/>
+            <a:off x="841248" y="3785616"/>
+            <a:ext cx="4937760" cy="365760"/>
           </a:xfrm>
           <a:prstGeom prst="rect">
             <a:avLst/>
@@ -5516,13 +5516,56 @@
           <a:p>
             <a:pPr marL="342900" indent="-342900">
               <a:lnSpc>
-                <a:spcPts val="1400"/>
+                <a:spcPts val="1350"/>
               </a:lnSpc>
               <a:buSzPct val="100000"/>
               <a:buChar char="•"/>
             </a:pPr>
             <a:r>
-              <a:rPr lang="en-US" sz="1050" dirty="0">
+              <a:rPr lang="en-US" sz="1000" dirty="0">
+                <a:solidFill>
+                  <a:srgbClr val="D6E7F3"/>
+                </a:solidFill>
+                <a:latin typeface="Calibri" pitchFamily="34" charset="0"/>
+                <a:ea typeface="Calibri" pitchFamily="34" charset="-122"/>
+                <a:cs typeface="Calibri" pitchFamily="34" charset="-120"/>
+              </a:rPr>
+              <a:t>iTax PAYE export for the KRA return</a:t>
+            </a:r>
+            <a:endParaRPr lang="en-US" sz="1000" dirty="0"/>
+          </a:p>
+        </p:txBody>
+      </p:sp>
+      <p:sp>
+        <p:nvSpPr>
+          <p:cNvPr id="11" name="Text 9"/>
+          <p:cNvSpPr txBox="1"/>
+          <p:nvPr/>
+        </p:nvSpPr>
+        <p:spPr>
+          <a:xfrm>
+            <a:off x="841248" y="4169664"/>
+            <a:ext cx="4937760" cy="365760"/>
+          </a:xfrm>
+          <a:prstGeom prst="rect">
+            <a:avLst/>
+          </a:prstGeom>
+          <a:noFill/>
+          <a:ln/>
+        </p:spPr>
+        <p:txBody>
+          <a:bodyPr wrap="square" lIns="0" tIns="0" rIns="0" bIns="0" rtlCol="0" anchor="ctr"/>
+          <a:lstStyle/>
+          <a:p>
+            <a:pPr marL="342900" indent="-342900">
+              <a:lnSpc>
+                <a:spcPts val="1350"/>
+              </a:lnSpc>
+              <a:buSzPct val="100000"/>
+              <a:buChar char="•"/>
+            </a:pPr>
+            <a:r>
+              <a:rPr lang="en-US" sz="1000" dirty="0">
                 <a:solidFill>
                   <a:srgbClr val="D6E7F3"/>
                 </a:solidFill>
@@ -5532,20 +5575,20 @@
               </a:rPr>
               <a:t>Employee portal and staff document store</a:t>
             </a:r>
-            <a:endParaRPr lang="en-US" sz="1050" dirty="0"/>
+            <a:endParaRPr lang="en-US" sz="1000" dirty="0"/>
           </a:p>
         </p:txBody>
       </p:sp>
       <p:sp>
         <p:nvSpPr>
-          <p:cNvPr id="11" name="Text 9"/>
+          <p:cNvPr id="12" name="Text 10"/>
           <p:cNvSpPr txBox="1"/>
           <p:nvPr/>
         </p:nvSpPr>
         <p:spPr>
           <a:xfrm>
-            <a:off x="841248" y="4389120"/>
-            <a:ext cx="4937760" cy="384048"/>
+            <a:off x="841248" y="4553712"/>
+            <a:ext cx="4937760" cy="365760"/>
           </a:xfrm>
           <a:prstGeom prst="rect">
             <a:avLst/>
@@ -5559,13 +5602,13 @@
           <a:p>
             <a:pPr marL="342900" indent="-342900">
               <a:lnSpc>
-                <a:spcPts val="1400"/>
+                <a:spcPts val="1350"/>
               </a:lnSpc>
               <a:buSzPct val="100000"/>
               <a:buChar char="•"/>
             </a:pPr>
             <a:r>
-              <a:rPr lang="en-US" sz="1050" dirty="0">
+              <a:rPr lang="en-US" sz="1000" dirty="0">
                 <a:solidFill>
                   <a:srgbClr val="D6E7F3"/>
                 </a:solidFill>
@@ -5575,13 +5618,13 @@
               </a:rPr>
               <a:t>Roles, approval workflow and audit trail</a:t>
             </a:r>
-            <a:endParaRPr lang="en-US" sz="1050" dirty="0"/>
+            <a:endParaRPr lang="en-US" sz="1000" dirty="0"/>
           </a:p>
         </p:txBody>
       </p:sp>
       <p:sp>
         <p:nvSpPr>
-          <p:cNvPr id="12" name="Shape 10"/>
+          <p:cNvPr id="13" name="Shape 11"/>
           <p:cNvSpPr/>
           <p:nvPr/>
         </p:nvSpPr>
@@ -5608,7 +5651,7 @@
       </p:sp>
       <p:sp>
         <p:nvSpPr>
-          <p:cNvPr id="13" name="Text 11"/>
+          <p:cNvPr id="14" name="Text 12"/>
           <p:cNvSpPr txBox="1"/>
           <p:nvPr/>
         </p:nvSpPr>
@@ -5647,7 +5690,7 @@
       </p:sp>
       <p:sp>
         <p:nvSpPr>
-          <p:cNvPr id="14" name="Text 12"/>
+          <p:cNvPr id="15" name="Text 13"/>
           <p:cNvSpPr txBox="1"/>
           <p:nvPr/>
         </p:nvSpPr>
@@ -5690,56 +5733,13 @@
       </p:sp>
       <p:sp>
         <p:nvSpPr>
-          <p:cNvPr id="15" name="Text 13"/>
-          <p:cNvSpPr txBox="1"/>
-          <p:nvPr/>
-        </p:nvSpPr>
-        <p:spPr>
-          <a:xfrm>
-            <a:off x="6464808" y="2706624"/>
-            <a:ext cx="4937760" cy="384048"/>
-          </a:xfrm>
-          <a:prstGeom prst="rect">
-            <a:avLst/>
-          </a:prstGeom>
-          <a:noFill/>
-          <a:ln/>
-        </p:spPr>
-        <p:txBody>
-          <a:bodyPr wrap="square" lIns="0" tIns="0" rIns="0" bIns="0" rtlCol="0" anchor="ctr"/>
-          <a:lstStyle/>
-          <a:p>
-            <a:pPr marL="342900" indent="-342900">
-              <a:lnSpc>
-                <a:spcPts val="1400"/>
-              </a:lnSpc>
-              <a:buSzPct val="100000"/>
-              <a:buChar char="•"/>
-            </a:pPr>
-            <a:r>
-              <a:rPr lang="en-US" sz="1050" dirty="0">
-                <a:solidFill>
-                  <a:srgbClr val="D6E7F3"/>
-                </a:solidFill>
-                <a:latin typeface="Calibri" pitchFamily="34" charset="0"/>
-                <a:ea typeface="Calibri" pitchFamily="34" charset="-122"/>
-                <a:cs typeface="Calibri" pitchFamily="34" charset="-120"/>
-              </a:rPr>
-              <a:t>Real bank and iTax templates, to match exactly</a:t>
-            </a:r>
-            <a:endParaRPr lang="en-US" sz="1050" dirty="0"/>
-          </a:p>
-        </p:txBody>
-      </p:sp>
-      <p:sp>
-        <p:nvSpPr>
           <p:cNvPr id="16" name="Text 14"/>
           <p:cNvSpPr txBox="1"/>
           <p:nvPr/>
         </p:nvSpPr>
         <p:spPr>
           <a:xfrm>
-            <a:off x="6464808" y="3127248"/>
+            <a:off x="6464808" y="2706624"/>
             <a:ext cx="4937760" cy="384048"/>
           </a:xfrm>
           <a:prstGeom prst="rect">
@@ -5782,7 +5782,7 @@
         </p:nvSpPr>
         <p:spPr>
           <a:xfrm>
-            <a:off x="6464808" y="3547872"/>
+            <a:off x="6464808" y="3127248"/>
             <a:ext cx="4937760" cy="384048"/>
           </a:xfrm>
           <a:prstGeom prst="rect">
@@ -5825,6 +5825,49 @@
         </p:nvSpPr>
         <p:spPr>
           <a:xfrm>
+            <a:off x="6464808" y="3547872"/>
+            <a:ext cx="4937760" cy="384048"/>
+          </a:xfrm>
+          <a:prstGeom prst="rect">
+            <a:avLst/>
+          </a:prstGeom>
+          <a:noFill/>
+          <a:ln/>
+        </p:spPr>
+        <p:txBody>
+          <a:bodyPr wrap="square" lIns="0" tIns="0" rIns="0" bIns="0" rtlCol="0" anchor="ctr"/>
+          <a:lstStyle/>
+          <a:p>
+            <a:pPr marL="342900" indent="-342900">
+              <a:lnSpc>
+                <a:spcPts val="1400"/>
+              </a:lnSpc>
+              <a:buSzPct val="100000"/>
+              <a:buChar char="•"/>
+            </a:pPr>
+            <a:r>
+              <a:rPr lang="en-US" sz="1050" dirty="0">
+                <a:solidFill>
+                  <a:srgbClr val="D6E7F3"/>
+                </a:solidFill>
+                <a:latin typeface="Calibri" pitchFamily="34" charset="0"/>
+                <a:ea typeface="Calibri" pitchFamily="34" charset="-122"/>
+                <a:cs typeface="Calibri" pitchFamily="34" charset="-120"/>
+              </a:rPr>
+              <a:t>iTax export re-cut to your exact P10 layout — 3 columns to confirm</a:t>
+            </a:r>
+            <a:endParaRPr lang="en-US" sz="1050" dirty="0"/>
+          </a:p>
+        </p:txBody>
+      </p:sp>
+      <p:sp>
+        <p:nvSpPr>
+          <p:cNvPr id="19" name="Text 17"/>
+          <p:cNvSpPr txBox="1"/>
+          <p:nvPr/>
+        </p:nvSpPr>
+        <p:spPr>
+          <a:xfrm>
             <a:off x="6464808" y="3968496"/>
             <a:ext cx="4937760" cy="384048"/>
           </a:xfrm>
@@ -5862,7 +5905,7 @@
       </p:sp>
       <p:sp>
         <p:nvSpPr>
-          <p:cNvPr id="19" name="Text 17"/>
+          <p:cNvPr id="20" name="Text 18"/>
           <p:cNvSpPr txBox="1"/>
           <p:nvPr/>
         </p:nvSpPr>
@@ -5901,7 +5944,7 @@
       </p:sp>
       <p:sp>
         <p:nvSpPr>
-          <p:cNvPr id="20" name="Text 18"/>
+          <p:cNvPr id="21" name="Text 19"/>
           <p:cNvSpPr txBox="1"/>
           <p:nvPr/>
         </p:nvSpPr>
@@ -5940,7 +5983,7 @@
       </p:sp>
       <p:pic>
         <p:nvPicPr>
-          <p:cNvPr id="21" name="Image 0" descr="nexora-mark.png">    </p:cNvPr>
+          <p:cNvPr id="22" name="Image 0" descr="nexora-mark.png">    </p:cNvPr>
           <p:cNvPicPr>
             <a:picLocks noChangeAspect="1"/>
           </p:cNvPicPr>
@@ -5964,7 +6007,7 @@
       </p:pic>
       <p:sp>
         <p:nvSpPr>
-          <p:cNvPr id="22" name="Text 19"/>
+          <p:cNvPr id="23" name="Text 20"/>
           <p:cNvSpPr txBox="1"/>
           <p:nvPr/>
         </p:nvSpPr>
@@ -6003,7 +6046,7 @@
       </p:sp>
       <p:sp>
         <p:nvSpPr>
-          <p:cNvPr id="23" name="Text 20"/>
+          <p:cNvPr id="24" name="Text 21"/>
           <p:cNvSpPr txBox="1"/>
           <p:nvPr/>
         </p:nvSpPr>

--- a/Nexora-Payroll-Presentation.pptx
+++ b/Nexora-Payroll-Presentation.pptx
@@ -3271,7 +3271,7 @@
                 <a:ea typeface="Calibri" pitchFamily="34" charset="-122"/>
                 <a:cs typeface="Calibri" pitchFamily="34" charset="-120"/>
               </a:rPr>
-              <a:t>Every net payment with the name, bank and account number already on file.</a:t>
+              <a:t>Built to your bank's own layout — header, debit, 46 payments, trailer.</a:t>
             </a:r>
             <a:endParaRPr lang="en-US" sz="1050" dirty="0"/>
           </a:p>
@@ -5487,7 +5487,7 @@
                 <a:ea typeface="Calibri" pitchFamily="34" charset="-122"/>
                 <a:cs typeface="Calibri" pitchFamily="34" charset="-120"/>
               </a:rPr>
-              <a:t>Bank batch file, with all 46 employees' details loaded</a:t>
+              <a:t>Bank batch file, matching your bank's own upload layout</a:t>
             </a:r>
             <a:endParaRPr lang="en-US" sz="1000" dirty="0"/>
           </a:p>
@@ -5811,7 +5811,7 @@
                 <a:ea typeface="Calibri" pitchFamily="34" charset="-122"/>
                 <a:cs typeface="Calibri" pitchFamily="34" charset="-120"/>
               </a:rPr>
-              <a:t>Your answers on the three open items</a:t>
+              <a:t>Your answers on the four open items</a:t>
             </a:r>
             <a:endParaRPr lang="en-US" sz="1050" dirty="0"/>
           </a:p>
@@ -19464,7 +19464,7 @@
                 <a:ea typeface="Calibri" pitchFamily="34" charset="-122"/>
                 <a:cs typeface="Calibri" pitchFamily="34" charset="-120"/>
               </a:rPr>
-              <a:t>journal lines</a:t>
+              <a:t>journal lines, all on screen</a:t>
             </a:r>
             <a:endParaRPr lang="en-US" sz="1100" dirty="0"/>
           </a:p>
@@ -19887,7 +19887,7 @@
                 <a:ea typeface="Cambria" pitchFamily="34" charset="-122"/>
                 <a:cs typeface="Cambria" pitchFamily="34" charset="-120"/>
               </a:rPr>
-              <a:t>Three things we'd like you to confirm</a:t>
+              <a:t>Four things we'd like you to confirm</a:t>
             </a:r>
             <a:endParaRPr lang="en-US" sz="3100" dirty="0"/>
           </a:p>
@@ -19926,7 +19926,7 @@
                 <a:ea typeface="Calibri" pitchFamily="34" charset="-122"/>
                 <a:cs typeface="Calibri" pitchFamily="34" charset="-120"/>
               </a:rPr>
-              <a:t>Everything else matches. These three don't — and we'd rather show them than let you find them.</a:t>
+              <a:t>Everything else matches. These four don't — and we'd rather show them than let you find them.</a:t>
             </a:r>
             <a:endParaRPr lang="en-US" sz="1250" dirty="0"/>
           </a:p>
@@ -19940,12 +19940,12 @@
         </p:nvSpPr>
         <p:spPr>
           <a:xfrm>
-            <a:off x="566928" y="1773936"/>
-            <a:ext cx="11055096" cy="1243584"/>
+            <a:off x="566928" y="1737360"/>
+            <a:ext cx="11055096" cy="1078992"/>
           </a:xfrm>
           <a:prstGeom prst="roundRect">
             <a:avLst>
-              <a:gd name="adj" fmla="val 5882"/>
+              <a:gd name="adj" fmla="val 6780"/>
             </a:avLst>
           </a:prstGeom>
           <a:solidFill>
@@ -19967,8 +19967,8 @@
         </p:nvSpPr>
         <p:spPr>
           <a:xfrm>
-            <a:off x="804672" y="1993392"/>
-            <a:ext cx="365760" cy="365760"/>
+            <a:off x="804672" y="1920240"/>
+            <a:ext cx="347472" cy="347472"/>
           </a:xfrm>
           <a:prstGeom prst="ellipse">
             <a:avLst/>
@@ -19987,8 +19987,8 @@
         </p:nvSpPr>
         <p:spPr>
           <a:xfrm>
-            <a:off x="804672" y="1993392"/>
-            <a:ext cx="365760" cy="365760"/>
+            <a:off x="804672" y="1920240"/>
+            <a:ext cx="347472" cy="347472"/>
           </a:xfrm>
           <a:prstGeom prst="rect">
             <a:avLst/>
@@ -20004,7 +20004,7 @@
               <a:buNone/>
             </a:pPr>
             <a:r>
-              <a:rPr lang="en-US" sz="1200" b="1" dirty="0">
+              <a:rPr lang="en-US" sz="1150" b="1" dirty="0">
                 <a:solidFill>
                   <a:srgbClr val="FFFFFF"/>
                 </a:solidFill>
@@ -20014,7 +20014,7 @@
               </a:rPr>
               <a:t>1</a:t>
             </a:r>
-            <a:endParaRPr lang="en-US" sz="1200" dirty="0"/>
+            <a:endParaRPr lang="en-US" sz="1150" dirty="0"/>
           </a:p>
         </p:txBody>
       </p:sp>
@@ -20026,8 +20026,8 @@
         </p:nvSpPr>
         <p:spPr>
           <a:xfrm>
-            <a:off x="1298448" y="1920240"/>
-            <a:ext cx="2651760" cy="274320"/>
+            <a:off x="1280160" y="1856232"/>
+            <a:ext cx="2651760" cy="256032"/>
           </a:xfrm>
           <a:prstGeom prst="rect">
             <a:avLst/>
@@ -20043,7 +20043,7 @@
               <a:buNone/>
             </a:pPr>
             <a:r>
-              <a:rPr lang="en-US" sz="1350" b="1" dirty="0">
+              <a:rPr lang="en-US" sz="1250" b="1" dirty="0">
                 <a:solidFill>
                   <a:srgbClr val="16232E"/>
                 </a:solidFill>
@@ -20053,7 +20053,7 @@
               </a:rPr>
               <a:t>Employer pension</a:t>
             </a:r>
-            <a:endParaRPr lang="en-US" sz="1350" dirty="0"/>
+            <a:endParaRPr lang="en-US" sz="1250" dirty="0"/>
           </a:p>
         </p:txBody>
       </p:sp>
@@ -20065,8 +20065,50 @@
         </p:nvSpPr>
         <p:spPr>
           <a:xfrm>
-            <a:off x="1298448" y="2212848"/>
-            <a:ext cx="2651760" cy="713232"/>
+            <a:off x="1280160" y="2121408"/>
+            <a:ext cx="2651760" cy="640080"/>
+          </a:xfrm>
+          <a:prstGeom prst="rect">
+            <a:avLst/>
+          </a:prstGeom>
+          <a:noFill/>
+          <a:ln/>
+        </p:spPr>
+        <p:txBody>
+          <a:bodyPr wrap="square" lIns="0" tIns="0" rIns="0" bIns="0" rtlCol="0" anchor="ctr"/>
+          <a:lstStyle/>
+          <a:p>
+            <a:pPr indent="0" marL="0">
+              <a:lnSpc>
+                <a:spcPts val="1200"/>
+              </a:lnSpc>
+              <a:buNone/>
+            </a:pPr>
+            <a:r>
+              <a:rPr lang="en-US" sz="950" dirty="0">
+                <a:solidFill>
+                  <a:srgbClr val="5D6E7C"/>
+                </a:solidFill>
+                <a:latin typeface="Calibri" pitchFamily="34" charset="0"/>
+                <a:ea typeface="Calibri" pitchFamily="34" charset="-122"/>
+                <a:cs typeface="Calibri" pitchFamily="34" charset="-120"/>
+              </a:rPr>
+              <a:t>Your workbook totals KES 585,199.19; the system calculates KES 606,144.06 — exactly 10% of basic pay.</a:t>
+            </a:r>
+            <a:endParaRPr lang="en-US" sz="950" dirty="0"/>
+          </a:p>
+        </p:txBody>
+      </p:sp>
+      <p:sp>
+        <p:nvSpPr>
+          <p:cNvPr id="10" name="Text 8"/>
+          <p:cNvSpPr txBox="1"/>
+          <p:nvPr/>
+        </p:nvSpPr>
+        <p:spPr>
+          <a:xfrm>
+            <a:off x="4114800" y="1883664"/>
+            <a:ext cx="4572000" cy="859536"/>
           </a:xfrm>
           <a:prstGeom prst="rect">
             <a:avLst/>
@@ -20093,7 +20135,7 @@
                 <a:ea typeface="Calibri" pitchFamily="34" charset="-122"/>
                 <a:cs typeface="Calibri" pitchFamily="34" charset="-120"/>
               </a:rPr>
-              <a:t>Your workbook totals KES 585,199.19; the system calculates KES 606,144.06 — exactly 10% of basic pay.</a:t>
+              <a:t>For staff 1000 your figure is higher than ours by exactly KES 1,740 — which happens to be the NSSF Tier II amount.</a:t>
             </a:r>
             <a:endParaRPr lang="en-US" sz="1000" dirty="0"/>
           </a:p>
@@ -20101,14 +20143,14 @@
       </p:sp>
       <p:sp>
         <p:nvSpPr>
-          <p:cNvPr id="10" name="Text 8"/>
+          <p:cNvPr id="11" name="Text 9"/>
           <p:cNvSpPr txBox="1"/>
           <p:nvPr/>
         </p:nvSpPr>
         <p:spPr>
           <a:xfrm>
-            <a:off x="4133088" y="1938528"/>
-            <a:ext cx="4572000" cy="969264"/>
+            <a:off x="8887968" y="1883664"/>
+            <a:ext cx="2468880" cy="859536"/>
           </a:xfrm>
           <a:prstGeom prst="rect">
             <a:avLst/>
@@ -20122,54 +20164,12 @@
           <a:p>
             <a:pPr indent="0" marL="0">
               <a:lnSpc>
-                <a:spcPts val="1400"/>
+                <a:spcPts val="1250"/>
               </a:lnSpc>
               <a:buNone/>
             </a:pPr>
             <a:r>
-              <a:rPr lang="en-US" sz="1050" dirty="0">
-                <a:solidFill>
-                  <a:srgbClr val="5D6E7C"/>
-                </a:solidFill>
-                <a:latin typeface="Calibri" pitchFamily="34" charset="0"/>
-                <a:ea typeface="Calibri" pitchFamily="34" charset="-122"/>
-                <a:cs typeface="Calibri" pitchFamily="34" charset="-120"/>
-              </a:rPr>
-              <a:t>Three cost centres agree to the cent, three don't. For staff 1000 your figure is higher by exactly KES 1,740 — the NSSF Tier II amount.</a:t>
-            </a:r>
-            <a:endParaRPr lang="en-US" sz="1050" dirty="0"/>
-          </a:p>
-        </p:txBody>
-      </p:sp>
-      <p:sp>
-        <p:nvSpPr>
-          <p:cNvPr id="11" name="Text 9"/>
-          <p:cNvSpPr txBox="1"/>
-          <p:nvPr/>
-        </p:nvSpPr>
-        <p:spPr>
-          <a:xfrm>
-            <a:off x="8887968" y="1938528"/>
-            <a:ext cx="2468880" cy="969264"/>
-          </a:xfrm>
-          <a:prstGeom prst="rect">
-            <a:avLst/>
-          </a:prstGeom>
-          <a:noFill/>
-          <a:ln/>
-        </p:spPr>
-        <p:txBody>
-          <a:bodyPr wrap="square" lIns="0" tIns="0" rIns="0" bIns="0" rtlCol="0" anchor="ctr"/>
-          <a:lstStyle/>
-          <a:p>
-            <a:pPr indent="0" marL="0">
-              <a:lnSpc>
-                <a:spcPts val="1350"/>
-              </a:lnSpc>
-              <a:buNone/>
-            </a:pPr>
-            <a:r>
-              <a:rPr lang="en-US" sz="1000" b="1" dirty="0">
+              <a:rPr lang="en-US" sz="950" b="1" dirty="0">
                 <a:solidFill>
                   <a:srgbClr val="16232E"/>
                 </a:solidFill>
@@ -20181,12 +20181,12 @@
             </a:r>
             <a:pPr indent="0" marL="0">
               <a:lnSpc>
-                <a:spcPts val="1350"/>
+                <a:spcPts val="1250"/>
               </a:lnSpc>
               <a:buNone/>
             </a:pPr>
             <a:r>
-              <a:rPr lang="en-US" sz="1000" dirty="0">
+              <a:rPr lang="en-US" sz="950" dirty="0">
                 <a:solidFill>
                   <a:srgbClr val="5D6E7C"/>
                 </a:solidFill>
@@ -20196,7 +20196,7 @@
               </a:rPr>
               <a:t>Does it include employer NSSF, and is anyone outside the scheme?</a:t>
             </a:r>
-            <a:endParaRPr lang="en-US" sz="1000" dirty="0"/>
+            <a:endParaRPr lang="en-US" sz="950" dirty="0"/>
           </a:p>
         </p:txBody>
       </p:sp>
@@ -20208,12 +20208,12 @@
         </p:nvSpPr>
         <p:spPr>
           <a:xfrm>
-            <a:off x="566928" y="3145536"/>
-            <a:ext cx="11055096" cy="1243584"/>
+            <a:off x="566928" y="2926080"/>
+            <a:ext cx="11055096" cy="1078992"/>
           </a:xfrm>
           <a:prstGeom prst="roundRect">
             <a:avLst>
-              <a:gd name="adj" fmla="val 5882"/>
+              <a:gd name="adj" fmla="val 6780"/>
             </a:avLst>
           </a:prstGeom>
           <a:solidFill>
@@ -20235,8 +20235,8 @@
         </p:nvSpPr>
         <p:spPr>
           <a:xfrm>
-            <a:off x="804672" y="3364992"/>
-            <a:ext cx="365760" cy="365760"/>
+            <a:off x="804672" y="3108960"/>
+            <a:ext cx="347472" cy="347472"/>
           </a:xfrm>
           <a:prstGeom prst="ellipse">
             <a:avLst/>
@@ -20255,8 +20255,8 @@
         </p:nvSpPr>
         <p:spPr>
           <a:xfrm>
-            <a:off x="804672" y="3364992"/>
-            <a:ext cx="365760" cy="365760"/>
+            <a:off x="804672" y="3108960"/>
+            <a:ext cx="347472" cy="347472"/>
           </a:xfrm>
           <a:prstGeom prst="rect">
             <a:avLst/>
@@ -20272,7 +20272,7 @@
               <a:buNone/>
             </a:pPr>
             <a:r>
-              <a:rPr lang="en-US" sz="1200" b="1" dirty="0">
+              <a:rPr lang="en-US" sz="1150" b="1" dirty="0">
                 <a:solidFill>
                   <a:srgbClr val="FFFFFF"/>
                 </a:solidFill>
@@ -20282,7 +20282,7 @@
               </a:rPr>
               <a:t>2</a:t>
             </a:r>
-            <a:endParaRPr lang="en-US" sz="1200" dirty="0"/>
+            <a:endParaRPr lang="en-US" sz="1150" dirty="0"/>
           </a:p>
         </p:txBody>
       </p:sp>
@@ -20294,8 +20294,8 @@
         </p:nvSpPr>
         <p:spPr>
           <a:xfrm>
-            <a:off x="1298448" y="3291840"/>
-            <a:ext cx="2651760" cy="274320"/>
+            <a:off x="1280160" y="3044952"/>
+            <a:ext cx="2651760" cy="256032"/>
           </a:xfrm>
           <a:prstGeom prst="rect">
             <a:avLst/>
@@ -20311,7 +20311,7 @@
               <a:buNone/>
             </a:pPr>
             <a:r>
-              <a:rPr lang="en-US" sz="1350" b="1" dirty="0">
+              <a:rPr lang="en-US" sz="1250" b="1" dirty="0">
                 <a:solidFill>
                   <a:srgbClr val="16232E"/>
                 </a:solidFill>
@@ -20321,7 +20321,7 @@
               </a:rPr>
               <a:t>NITA levy</a:t>
             </a:r>
-            <a:endParaRPr lang="en-US" sz="1350" dirty="0"/>
+            <a:endParaRPr lang="en-US" sz="1250" dirty="0"/>
           </a:p>
         </p:txBody>
       </p:sp>
@@ -20333,8 +20333,50 @@
         </p:nvSpPr>
         <p:spPr>
           <a:xfrm>
-            <a:off x="1298448" y="3584448"/>
-            <a:ext cx="2651760" cy="713232"/>
+            <a:off x="1280160" y="3310128"/>
+            <a:ext cx="2651760" cy="640080"/>
+          </a:xfrm>
+          <a:prstGeom prst="rect">
+            <a:avLst/>
+          </a:prstGeom>
+          <a:noFill/>
+          <a:ln/>
+        </p:spPr>
+        <p:txBody>
+          <a:bodyPr wrap="square" lIns="0" tIns="0" rIns="0" bIns="0" rtlCol="0" anchor="ctr"/>
+          <a:lstStyle/>
+          <a:p>
+            <a:pPr indent="0" marL="0">
+              <a:lnSpc>
+                <a:spcPts val="1200"/>
+              </a:lnSpc>
+              <a:buNone/>
+            </a:pPr>
+            <a:r>
+              <a:rPr lang="en-US" sz="950" dirty="0">
+                <a:solidFill>
+                  <a:srgbClr val="5D6E7C"/>
+                </a:solidFill>
+                <a:latin typeface="Calibri" pitchFamily="34" charset="0"/>
+                <a:ea typeface="Calibri" pitchFamily="34" charset="-122"/>
+                <a:cs typeface="Calibri" pitchFamily="34" charset="-120"/>
+              </a:rPr>
+              <a:t>Your summary row shows KES 2,400. Your own GL working shows KES 2,300 — and so do we.</a:t>
+            </a:r>
+            <a:endParaRPr lang="en-US" sz="950" dirty="0"/>
+          </a:p>
+        </p:txBody>
+      </p:sp>
+      <p:sp>
+        <p:nvSpPr>
+          <p:cNvPr id="17" name="Text 15"/>
+          <p:cNvSpPr txBox="1"/>
+          <p:nvPr/>
+        </p:nvSpPr>
+        <p:spPr>
+          <a:xfrm>
+            <a:off x="4114800" y="3072384"/>
+            <a:ext cx="4572000" cy="859536"/>
           </a:xfrm>
           <a:prstGeom prst="rect">
             <a:avLst/>
@@ -20361,7 +20403,7 @@
                 <a:ea typeface="Calibri" pitchFamily="34" charset="-122"/>
                 <a:cs typeface="Calibri" pitchFamily="34" charset="-120"/>
               </a:rPr>
-              <a:t>Your summary row shows KES 2,400. Your own GL working shows KES 2,300 — and so do we.</a:t>
+              <a:t>KES 2,300 is 46 employees at KES 50, which matches the headcount.</a:t>
             </a:r>
             <a:endParaRPr lang="en-US" sz="1000" dirty="0"/>
           </a:p>
@@ -20369,14 +20411,14 @@
       </p:sp>
       <p:sp>
         <p:nvSpPr>
-          <p:cNvPr id="17" name="Text 15"/>
+          <p:cNvPr id="18" name="Text 16"/>
           <p:cNvSpPr txBox="1"/>
           <p:nvPr/>
         </p:nvSpPr>
         <p:spPr>
           <a:xfrm>
-            <a:off x="4133088" y="3310128"/>
-            <a:ext cx="4572000" cy="969264"/>
+            <a:off x="8887968" y="3072384"/>
+            <a:ext cx="2468880" cy="859536"/>
           </a:xfrm>
           <a:prstGeom prst="rect">
             <a:avLst/>
@@ -20390,54 +20432,12 @@
           <a:p>
             <a:pPr indent="0" marL="0">
               <a:lnSpc>
-                <a:spcPts val="1400"/>
+                <a:spcPts val="1250"/>
               </a:lnSpc>
               <a:buNone/>
             </a:pPr>
             <a:r>
-              <a:rPr lang="en-US" sz="1050" dirty="0">
-                <a:solidFill>
-                  <a:srgbClr val="5D6E7C"/>
-                </a:solidFill>
-                <a:latin typeface="Calibri" pitchFamily="34" charset="0"/>
-                <a:ea typeface="Calibri" pitchFamily="34" charset="-122"/>
-                <a:cs typeface="Calibri" pitchFamily="34" charset="-120"/>
-              </a:rPr>
-              <a:t>KES 2,300 is 46 employees at KES 50, which matches the headcount.</a:t>
-            </a:r>
-            <a:endParaRPr lang="en-US" sz="1050" dirty="0"/>
-          </a:p>
-        </p:txBody>
-      </p:sp>
-      <p:sp>
-        <p:nvSpPr>
-          <p:cNvPr id="18" name="Text 16"/>
-          <p:cNvSpPr txBox="1"/>
-          <p:nvPr/>
-        </p:nvSpPr>
-        <p:spPr>
-          <a:xfrm>
-            <a:off x="8887968" y="3310128"/>
-            <a:ext cx="2468880" cy="969264"/>
-          </a:xfrm>
-          <a:prstGeom prst="rect">
-            <a:avLst/>
-          </a:prstGeom>
-          <a:noFill/>
-          <a:ln/>
-        </p:spPr>
-        <p:txBody>
-          <a:bodyPr wrap="square" lIns="0" tIns="0" rIns="0" bIns="0" rtlCol="0" anchor="ctr"/>
-          <a:lstStyle/>
-          <a:p>
-            <a:pPr indent="0" marL="0">
-              <a:lnSpc>
-                <a:spcPts val="1350"/>
-              </a:lnSpc>
-              <a:buNone/>
-            </a:pPr>
-            <a:r>
-              <a:rPr lang="en-US" sz="1000" b="1" dirty="0">
+              <a:rPr lang="en-US" sz="950" b="1" dirty="0">
                 <a:solidFill>
                   <a:srgbClr val="16232E"/>
                 </a:solidFill>
@@ -20449,12 +20449,12 @@
             </a:r>
             <a:pPr indent="0" marL="0">
               <a:lnSpc>
-                <a:spcPts val="1350"/>
+                <a:spcPts val="1250"/>
               </a:lnSpc>
               <a:buNone/>
             </a:pPr>
             <a:r>
-              <a:rPr lang="en-US" sz="1000" dirty="0">
+              <a:rPr lang="en-US" sz="950" dirty="0">
                 <a:solidFill>
                   <a:srgbClr val="5D6E7C"/>
                 </a:solidFill>
@@ -20464,7 +20464,7 @@
               </a:rPr>
               <a:t>Can we treat KES 2,300 as correct?</a:t>
             </a:r>
-            <a:endParaRPr lang="en-US" sz="1000" dirty="0"/>
+            <a:endParaRPr lang="en-US" sz="950" dirty="0"/>
           </a:p>
         </p:txBody>
       </p:sp>
@@ -20476,12 +20476,12 @@
         </p:nvSpPr>
         <p:spPr>
           <a:xfrm>
-            <a:off x="566928" y="4517136"/>
-            <a:ext cx="11055096" cy="1243584"/>
+            <a:off x="566928" y="4114800"/>
+            <a:ext cx="11055096" cy="1078992"/>
           </a:xfrm>
           <a:prstGeom prst="roundRect">
             <a:avLst>
-              <a:gd name="adj" fmla="val 5882"/>
+              <a:gd name="adj" fmla="val 6780"/>
             </a:avLst>
           </a:prstGeom>
           <a:solidFill>
@@ -20503,8 +20503,8 @@
         </p:nvSpPr>
         <p:spPr>
           <a:xfrm>
-            <a:off x="804672" y="4736592"/>
-            <a:ext cx="365760" cy="365760"/>
+            <a:off x="804672" y="4297680"/>
+            <a:ext cx="347472" cy="347472"/>
           </a:xfrm>
           <a:prstGeom prst="ellipse">
             <a:avLst/>
@@ -20523,8 +20523,8 @@
         </p:nvSpPr>
         <p:spPr>
           <a:xfrm>
-            <a:off x="804672" y="4736592"/>
-            <a:ext cx="365760" cy="365760"/>
+            <a:off x="804672" y="4297680"/>
+            <a:ext cx="347472" cy="347472"/>
           </a:xfrm>
           <a:prstGeom prst="rect">
             <a:avLst/>
@@ -20540,7 +20540,7 @@
               <a:buNone/>
             </a:pPr>
             <a:r>
-              <a:rPr lang="en-US" sz="1200" b="1" dirty="0">
+              <a:rPr lang="en-US" sz="1150" b="1" dirty="0">
                 <a:solidFill>
                   <a:srgbClr val="FFFFFF"/>
                 </a:solidFill>
@@ -20550,7 +20550,7 @@
               </a:rPr>
               <a:t>3</a:t>
             </a:r>
-            <a:endParaRPr lang="en-US" sz="1200" dirty="0"/>
+            <a:endParaRPr lang="en-US" sz="1150" dirty="0"/>
           </a:p>
         </p:txBody>
       </p:sp>
@@ -20562,8 +20562,8 @@
         </p:nvSpPr>
         <p:spPr>
           <a:xfrm>
-            <a:off x="1298448" y="4663440"/>
-            <a:ext cx="2651760" cy="274320"/>
+            <a:off x="1280160" y="4233672"/>
+            <a:ext cx="2651760" cy="256032"/>
           </a:xfrm>
           <a:prstGeom prst="rect">
             <a:avLst/>
@@ -20579,7 +20579,7 @@
               <a:buNone/>
             </a:pPr>
             <a:r>
-              <a:rPr lang="en-US" sz="1350" b="1" dirty="0">
+              <a:rPr lang="en-US" sz="1250" b="1" dirty="0">
                 <a:solidFill>
                   <a:srgbClr val="16232E"/>
                 </a:solidFill>
@@ -20589,7 +20589,7 @@
               </a:rPr>
               <a:t>How relief is shown</a:t>
             </a:r>
-            <a:endParaRPr lang="en-US" sz="1350" dirty="0"/>
+            <a:endParaRPr lang="en-US" sz="1250" dirty="0"/>
           </a:p>
         </p:txBody>
       </p:sp>
@@ -20601,8 +20601,50 @@
         </p:nvSpPr>
         <p:spPr>
           <a:xfrm>
-            <a:off x="1298448" y="4956048"/>
-            <a:ext cx="2651760" cy="713232"/>
+            <a:off x="1280160" y="4498848"/>
+            <a:ext cx="2651760" cy="640080"/>
+          </a:xfrm>
+          <a:prstGeom prst="rect">
+            <a:avLst/>
+          </a:prstGeom>
+          <a:noFill/>
+          <a:ln/>
+        </p:spPr>
+        <p:txBody>
+          <a:bodyPr wrap="square" lIns="0" tIns="0" rIns="0" bIns="0" rtlCol="0" anchor="ctr"/>
+          <a:lstStyle/>
+          <a:p>
+            <a:pPr indent="0" marL="0">
+              <a:lnSpc>
+                <a:spcPts val="1200"/>
+              </a:lnSpc>
+              <a:buNone/>
+            </a:pPr>
+            <a:r>
+              <a:rPr lang="en-US" sz="950" dirty="0">
+                <a:solidFill>
+                  <a:srgbClr val="5D6E7C"/>
+                </a:solidFill>
+                <a:latin typeface="Calibri" pitchFamily="34" charset="0"/>
+                <a:ea typeface="Calibri" pitchFamily="34" charset="-122"/>
+                <a:cs typeface="Calibri" pitchFamily="34" charset="-120"/>
+              </a:rPr>
+              <a:t>Gross PAYE and personal relief each differ by about KES 2,400 — but PAYE payable agrees to four cents.</a:t>
+            </a:r>
+            <a:endParaRPr lang="en-US" sz="950" dirty="0"/>
+          </a:p>
+        </p:txBody>
+      </p:sp>
+      <p:sp>
+        <p:nvSpPr>
+          <p:cNvPr id="24" name="Text 22"/>
+          <p:cNvSpPr txBox="1"/>
+          <p:nvPr/>
+        </p:nvSpPr>
+        <p:spPr>
+          <a:xfrm>
+            <a:off x="4114800" y="4261104"/>
+            <a:ext cx="4572000" cy="859536"/>
           </a:xfrm>
           <a:prstGeom prst="rect">
             <a:avLst/>
@@ -20629,7 +20671,7 @@
                 <a:ea typeface="Calibri" pitchFamily="34" charset="-122"/>
                 <a:cs typeface="Calibri" pitchFamily="34" charset="-120"/>
               </a:rPr>
-              <a:t>Gross PAYE and personal relief each differ by about KES 2,400 — but PAYE payable agrees to four cents.</a:t>
+              <a:t>Where relief exceeds the tax due, we stop at zero rather than carrying a negative. The amount remitted is identical.</a:t>
             </a:r>
             <a:endParaRPr lang="en-US" sz="1000" dirty="0"/>
           </a:p>
@@ -20637,14 +20679,14 @@
       </p:sp>
       <p:sp>
         <p:nvSpPr>
-          <p:cNvPr id="24" name="Text 22"/>
+          <p:cNvPr id="25" name="Text 23"/>
           <p:cNvSpPr txBox="1"/>
           <p:nvPr/>
         </p:nvSpPr>
         <p:spPr>
           <a:xfrm>
-            <a:off x="4133088" y="4681728"/>
-            <a:ext cx="4572000" cy="969264"/>
+            <a:off x="8887968" y="4261104"/>
+            <a:ext cx="2468880" cy="859536"/>
           </a:xfrm>
           <a:prstGeom prst="rect">
             <a:avLst/>
@@ -20658,54 +20700,12 @@
           <a:p>
             <a:pPr indent="0" marL="0">
               <a:lnSpc>
-                <a:spcPts val="1400"/>
+                <a:spcPts val="1250"/>
               </a:lnSpc>
               <a:buNone/>
             </a:pPr>
             <a:r>
-              <a:rPr lang="en-US" sz="1050" dirty="0">
-                <a:solidFill>
-                  <a:srgbClr val="5D6E7C"/>
-                </a:solidFill>
-                <a:latin typeface="Calibri" pitchFamily="34" charset="0"/>
-                <a:ea typeface="Calibri" pitchFamily="34" charset="-122"/>
-                <a:cs typeface="Calibri" pitchFamily="34" charset="-120"/>
-              </a:rPr>
-              <a:t>Where relief exceeds the tax due, we stop at zero rather than carrying a negative. The amount remitted is identical.</a:t>
-            </a:r>
-            <a:endParaRPr lang="en-US" sz="1050" dirty="0"/>
-          </a:p>
-        </p:txBody>
-      </p:sp>
-      <p:sp>
-        <p:nvSpPr>
-          <p:cNvPr id="25" name="Text 23"/>
-          <p:cNvSpPr txBox="1"/>
-          <p:nvPr/>
-        </p:nvSpPr>
-        <p:spPr>
-          <a:xfrm>
-            <a:off x="8887968" y="4681728"/>
-            <a:ext cx="2468880" cy="969264"/>
-          </a:xfrm>
-          <a:prstGeom prst="rect">
-            <a:avLst/>
-          </a:prstGeom>
-          <a:noFill/>
-          <a:ln/>
-        </p:spPr>
-        <p:txBody>
-          <a:bodyPr wrap="square" lIns="0" tIns="0" rIns="0" bIns="0" rtlCol="0" anchor="ctr"/>
-          <a:lstStyle/>
-          <a:p>
-            <a:pPr indent="0" marL="0">
-              <a:lnSpc>
-                <a:spcPts val="1350"/>
-              </a:lnSpc>
-              <a:buNone/>
-            </a:pPr>
-            <a:r>
-              <a:rPr lang="en-US" sz="1000" b="1" dirty="0">
+              <a:rPr lang="en-US" sz="950" b="1" dirty="0">
                 <a:solidFill>
                   <a:srgbClr val="16232E"/>
                 </a:solidFill>
@@ -20717,7 +20717,216 @@
             </a:r>
             <a:pPr indent="0" marL="0">
               <a:lnSpc>
-                <a:spcPts val="1350"/>
+                <a:spcPts val="1250"/>
+              </a:lnSpc>
+              <a:buNone/>
+            </a:pPr>
+            <a:r>
+              <a:rPr lang="en-US" sz="950" dirty="0">
+                <a:solidFill>
+                  <a:srgbClr val="5D6E7C"/>
+                </a:solidFill>
+                <a:latin typeface="Calibri" pitchFamily="34" charset="0"/>
+                <a:ea typeface="Calibri" pitchFamily="34" charset="-122"/>
+                <a:cs typeface="Calibri" pitchFamily="34" charset="-120"/>
+              </a:rPr>
+              <a:t>Happy with how this reads on the payslip?</a:t>
+            </a:r>
+            <a:endParaRPr lang="en-US" sz="950" dirty="0"/>
+          </a:p>
+        </p:txBody>
+      </p:sp>
+      <p:sp>
+        <p:nvSpPr>
+          <p:cNvPr id="26" name="Shape 24"/>
+          <p:cNvSpPr/>
+          <p:nvPr/>
+        </p:nvSpPr>
+        <p:spPr>
+          <a:xfrm>
+            <a:off x="566928" y="5303520"/>
+            <a:ext cx="11055096" cy="1078992"/>
+          </a:xfrm>
+          <a:prstGeom prst="roundRect">
+            <a:avLst>
+              <a:gd name="adj" fmla="val 6780"/>
+            </a:avLst>
+          </a:prstGeom>
+          <a:solidFill>
+            <a:srgbClr val="F4F8FC"/>
+          </a:solidFill>
+          <a:ln w="12700">
+            <a:solidFill>
+              <a:srgbClr val="F4F8FC"/>
+            </a:solidFill>
+            <a:prstDash val="solid"/>
+          </a:ln>
+        </p:spPr>
+      </p:sp>
+      <p:sp>
+        <p:nvSpPr>
+          <p:cNvPr id="27" name="Shape 25"/>
+          <p:cNvSpPr/>
+          <p:nvPr/>
+        </p:nvSpPr>
+        <p:spPr>
+          <a:xfrm>
+            <a:off x="804672" y="5486400"/>
+            <a:ext cx="347472" cy="347472"/>
+          </a:xfrm>
+          <a:prstGeom prst="ellipse">
+            <a:avLst/>
+          </a:prstGeom>
+          <a:solidFill>
+            <a:srgbClr val="0E76BC"/>
+          </a:solidFill>
+          <a:ln/>
+        </p:spPr>
+      </p:sp>
+      <p:sp>
+        <p:nvSpPr>
+          <p:cNvPr id="28" name="Text 26"/>
+          <p:cNvSpPr txBox="1"/>
+          <p:nvPr/>
+        </p:nvSpPr>
+        <p:spPr>
+          <a:xfrm>
+            <a:off x="804672" y="5486400"/>
+            <a:ext cx="347472" cy="347472"/>
+          </a:xfrm>
+          <a:prstGeom prst="rect">
+            <a:avLst/>
+          </a:prstGeom>
+          <a:noFill/>
+          <a:ln/>
+        </p:spPr>
+        <p:txBody>
+          <a:bodyPr wrap="square" lIns="0" tIns="0" rIns="0" bIns="0" rtlCol="0" anchor="ctr"/>
+          <a:lstStyle/>
+          <a:p>
+            <a:pPr algn="ctr" indent="0" marL="0">
+              <a:buNone/>
+            </a:pPr>
+            <a:r>
+              <a:rPr lang="en-US" sz="1150" b="1" dirty="0">
+                <a:solidFill>
+                  <a:srgbClr val="FFFFFF"/>
+                </a:solidFill>
+                <a:latin typeface="Calibri" pitchFamily="34" charset="0"/>
+                <a:ea typeface="Calibri" pitchFamily="34" charset="-122"/>
+                <a:cs typeface="Calibri" pitchFamily="34" charset="-120"/>
+              </a:rPr>
+              <a:t>4</a:t>
+            </a:r>
+            <a:endParaRPr lang="en-US" sz="1150" dirty="0"/>
+          </a:p>
+        </p:txBody>
+      </p:sp>
+      <p:sp>
+        <p:nvSpPr>
+          <p:cNvPr id="29" name="Text 27"/>
+          <p:cNvSpPr txBox="1"/>
+          <p:nvPr/>
+        </p:nvSpPr>
+        <p:spPr>
+          <a:xfrm>
+            <a:off x="1280160" y="5422392"/>
+            <a:ext cx="2651760" cy="256032"/>
+          </a:xfrm>
+          <a:prstGeom prst="rect">
+            <a:avLst/>
+          </a:prstGeom>
+          <a:noFill/>
+          <a:ln/>
+        </p:spPr>
+        <p:txBody>
+          <a:bodyPr wrap="square" lIns="0" tIns="0" rIns="0" bIns="0" rtlCol="0" anchor="ctr"/>
+          <a:lstStyle/>
+          <a:p>
+            <a:pPr indent="0" marL="0">
+              <a:buNone/>
+            </a:pPr>
+            <a:r>
+              <a:rPr lang="en-US" sz="1250" b="1" dirty="0">
+                <a:solidFill>
+                  <a:srgbClr val="16232E"/>
+                </a:solidFill>
+                <a:latin typeface="Calibri" pitchFamily="34" charset="0"/>
+                <a:ea typeface="Calibri" pitchFamily="34" charset="-122"/>
+                <a:cs typeface="Calibri" pitchFamily="34" charset="-120"/>
+              </a:rPr>
+              <a:t>Two duplicate references</a:t>
+            </a:r>
+            <a:endParaRPr lang="en-US" sz="1250" dirty="0"/>
+          </a:p>
+        </p:txBody>
+      </p:sp>
+      <p:sp>
+        <p:nvSpPr>
+          <p:cNvPr id="30" name="Text 28"/>
+          <p:cNvSpPr txBox="1"/>
+          <p:nvPr/>
+        </p:nvSpPr>
+        <p:spPr>
+          <a:xfrm>
+            <a:off x="1280160" y="5687568"/>
+            <a:ext cx="2651760" cy="640080"/>
+          </a:xfrm>
+          <a:prstGeom prst="rect">
+            <a:avLst/>
+          </a:prstGeom>
+          <a:noFill/>
+          <a:ln/>
+        </p:spPr>
+        <p:txBody>
+          <a:bodyPr wrap="square" lIns="0" tIns="0" rIns="0" bIns="0" rtlCol="0" anchor="ctr"/>
+          <a:lstStyle/>
+          <a:p>
+            <a:pPr indent="0" marL="0">
+              <a:lnSpc>
+                <a:spcPts val="1200"/>
+              </a:lnSpc>
+              <a:buNone/>
+            </a:pPr>
+            <a:r>
+              <a:rPr lang="en-US" sz="950" dirty="0">
+                <a:solidFill>
+                  <a:srgbClr val="5D6E7C"/>
+                </a:solidFill>
+                <a:latin typeface="Calibri" pitchFamily="34" charset="0"/>
+                <a:ea typeface="Calibri" pitchFamily="34" charset="-122"/>
+                <a:cs typeface="Calibri" pitchFamily="34" charset="-120"/>
+              </a:rPr>
+              <a:t>Your bank file gives staff 1011 and 1012 the same reference, EMP011 — and 1029 and 1031 both EMP032.</a:t>
+            </a:r>
+            <a:endParaRPr lang="en-US" sz="950" dirty="0"/>
+          </a:p>
+        </p:txBody>
+      </p:sp>
+      <p:sp>
+        <p:nvSpPr>
+          <p:cNvPr id="31" name="Text 29"/>
+          <p:cNvSpPr txBox="1"/>
+          <p:nvPr/>
+        </p:nvSpPr>
+        <p:spPr>
+          <a:xfrm>
+            <a:off x="4114800" y="5449824"/>
+            <a:ext cx="4572000" cy="859536"/>
+          </a:xfrm>
+          <a:prstGeom prst="rect">
+            <a:avLst/>
+          </a:prstGeom>
+          <a:noFill/>
+          <a:ln/>
+        </p:spPr>
+        <p:txBody>
+          <a:bodyPr wrap="square" lIns="0" tIns="0" rIns="0" bIns="0" rtlCol="0" anchor="ctr"/>
+          <a:lstStyle/>
+          <a:p>
+            <a:pPr indent="0" marL="0">
+              <a:lnSpc>
+                <a:spcPts val="1300"/>
               </a:lnSpc>
               <a:buNone/>
             </a:pPr>
@@ -20730,9 +20939,68 @@
                 <a:ea typeface="Calibri" pitchFamily="34" charset="-122"/>
                 <a:cs typeface="Calibri" pitchFamily="34" charset="-120"/>
               </a:rPr>
-              <a:t>Happy with how this reads on the payslip?</a:t>
+              <a:t>Two people sharing a payment reference is the kind of thing a bank queries, or worse, applies to the wrong account.</a:t>
             </a:r>
             <a:endParaRPr lang="en-US" sz="1000" dirty="0"/>
+          </a:p>
+        </p:txBody>
+      </p:sp>
+      <p:sp>
+        <p:nvSpPr>
+          <p:cNvPr id="32" name="Text 30"/>
+          <p:cNvSpPr txBox="1"/>
+          <p:nvPr/>
+        </p:nvSpPr>
+        <p:spPr>
+          <a:xfrm>
+            <a:off x="8887968" y="5449824"/>
+            <a:ext cx="2468880" cy="859536"/>
+          </a:xfrm>
+          <a:prstGeom prst="rect">
+            <a:avLst/>
+          </a:prstGeom>
+          <a:noFill/>
+          <a:ln/>
+        </p:spPr>
+        <p:txBody>
+          <a:bodyPr wrap="square" lIns="0" tIns="0" rIns="0" bIns="0" rtlCol="0" anchor="ctr"/>
+          <a:lstStyle/>
+          <a:p>
+            <a:pPr indent="0" marL="0">
+              <a:lnSpc>
+                <a:spcPts val="1250"/>
+              </a:lnSpc>
+              <a:buNone/>
+            </a:pPr>
+            <a:r>
+              <a:rPr lang="en-US" sz="950" b="1" dirty="0">
+                <a:solidFill>
+                  <a:srgbClr val="16232E"/>
+                </a:solidFill>
+                <a:latin typeface="Calibri" pitchFamily="34" charset="0"/>
+                <a:ea typeface="Calibri" pitchFamily="34" charset="-122"/>
+                <a:cs typeface="Calibri" pitchFamily="34" charset="-120"/>
+              </a:rPr>
+              <a:t>We need:  </a:t>
+            </a:r>
+            <a:pPr indent="0" marL="0">
+              <a:lnSpc>
+                <a:spcPts val="1250"/>
+              </a:lnSpc>
+              <a:buNone/>
+            </a:pPr>
+            <a:r>
+              <a:rPr lang="en-US" sz="950" dirty="0">
+                <a:solidFill>
+                  <a:srgbClr val="5D6E7C"/>
+                </a:solidFill>
+                <a:latin typeface="Calibri" pitchFamily="34" charset="0"/>
+                <a:ea typeface="Calibri" pitchFamily="34" charset="-122"/>
+                <a:cs typeface="Calibri" pitchFamily="34" charset="-120"/>
+              </a:rPr>
+              <a:t>Which reference belongs to whom?</a:t>
+            </a:r>
+            <a:endParaRPr lang="en-US" sz="950" dirty="0"/>
           </a:p>
         </p:txBody>
       </p:sp>
